--- a/Защита диплома/Anfimov_diplom.pptx
+++ b/Защита диплома/Anfimov_diplom.pptx
@@ -5,7 +5,7 @@
     <p:sldMasterId id="2147483678" r:id="rId1"/>
   </p:sldMasterIdLst>
   <p:notesMasterIdLst>
-    <p:notesMasterId r:id="rId23"/>
+    <p:notesMasterId r:id="rId21"/>
   </p:notesMasterIdLst>
   <p:sldIdLst>
     <p:sldId id="256" r:id="rId2"/>
@@ -27,8 +27,6 @@
     <p:sldId id="275" r:id="rId18"/>
     <p:sldId id="287" r:id="rId19"/>
     <p:sldId id="267" r:id="rId20"/>
-    <p:sldId id="276" r:id="rId21"/>
-    <p:sldId id="288" r:id="rId22"/>
   </p:sldIdLst>
   <p:sldSz cx="12192000" cy="6858000"/>
   <p:notesSz cx="6858000" cy="9144000"/>
@@ -217,7 +215,7 @@
           <a:p>
             <a:fld id="{C5626634-CE2F-4DD7-8FF3-A2AF8CEFAA4F}" type="datetimeFigureOut">
               <a:rPr lang="ru-RU" smtClean="0"/>
-              <a:t>16.04.2026</a:t>
+              <a:t>30.04.2026</a:t>
             </a:fld>
             <a:endParaRPr lang="ru-RU"/>
           </a:p>
@@ -731,7 +729,7 @@
           <a:p>
             <a:fld id="{D4C78990-BC74-4702-B11E-A02B45A34803}" type="datetimeFigureOut">
               <a:rPr lang="ru-RU" smtClean="0"/>
-              <a:t>16.04.2026</a:t>
+              <a:t>30.04.2026</a:t>
             </a:fld>
             <a:endParaRPr lang="ru-RU"/>
           </a:p>
@@ -901,7 +899,7 @@
           <a:p>
             <a:fld id="{D4C78990-BC74-4702-B11E-A02B45A34803}" type="datetimeFigureOut">
               <a:rPr lang="ru-RU" smtClean="0"/>
-              <a:t>16.04.2026</a:t>
+              <a:t>30.04.2026</a:t>
             </a:fld>
             <a:endParaRPr lang="ru-RU"/>
           </a:p>
@@ -1081,7 +1079,7 @@
           <a:p>
             <a:fld id="{D4C78990-BC74-4702-B11E-A02B45A34803}" type="datetimeFigureOut">
               <a:rPr lang="ru-RU" smtClean="0"/>
-              <a:t>16.04.2026</a:t>
+              <a:t>30.04.2026</a:t>
             </a:fld>
             <a:endParaRPr lang="ru-RU"/>
           </a:p>
@@ -1251,7 +1249,7 @@
           <a:p>
             <a:fld id="{D4C78990-BC74-4702-B11E-A02B45A34803}" type="datetimeFigureOut">
               <a:rPr lang="ru-RU" smtClean="0"/>
-              <a:t>16.04.2026</a:t>
+              <a:t>30.04.2026</a:t>
             </a:fld>
             <a:endParaRPr lang="ru-RU"/>
           </a:p>
@@ -1519,7 +1517,7 @@
           <a:p>
             <a:fld id="{D4C78990-BC74-4702-B11E-A02B45A34803}" type="datetimeFigureOut">
               <a:rPr lang="ru-RU" smtClean="0"/>
-              <a:t>16.04.2026</a:t>
+              <a:t>30.04.2026</a:t>
             </a:fld>
             <a:endParaRPr lang="ru-RU"/>
           </a:p>
@@ -1751,7 +1749,7 @@
           <a:p>
             <a:fld id="{D4C78990-BC74-4702-B11E-A02B45A34803}" type="datetimeFigureOut">
               <a:rPr lang="ru-RU" smtClean="0"/>
-              <a:t>16.04.2026</a:t>
+              <a:t>30.04.2026</a:t>
             </a:fld>
             <a:endParaRPr lang="ru-RU"/>
           </a:p>
@@ -2110,7 +2108,7 @@
           <a:p>
             <a:fld id="{D4C78990-BC74-4702-B11E-A02B45A34803}" type="datetimeFigureOut">
               <a:rPr lang="ru-RU" smtClean="0"/>
-              <a:t>16.04.2026</a:t>
+              <a:t>30.04.2026</a:t>
             </a:fld>
             <a:endParaRPr lang="ru-RU"/>
           </a:p>
@@ -2251,7 +2249,7 @@
           <a:p>
             <a:fld id="{D4C78990-BC74-4702-B11E-A02B45A34803}" type="datetimeFigureOut">
               <a:rPr lang="ru-RU" smtClean="0"/>
-              <a:t>16.04.2026</a:t>
+              <a:t>30.04.2026</a:t>
             </a:fld>
             <a:endParaRPr lang="ru-RU"/>
           </a:p>
@@ -2346,7 +2344,7 @@
           <a:p>
             <a:fld id="{D4C78990-BC74-4702-B11E-A02B45A34803}" type="datetimeFigureOut">
               <a:rPr lang="ru-RU" smtClean="0"/>
-              <a:t>16.04.2026</a:t>
+              <a:t>30.04.2026</a:t>
             </a:fld>
             <a:endParaRPr lang="ru-RU"/>
           </a:p>
@@ -2703,7 +2701,7 @@
           <a:p>
             <a:fld id="{D4C78990-BC74-4702-B11E-A02B45A34803}" type="datetimeFigureOut">
               <a:rPr lang="ru-RU" smtClean="0"/>
-              <a:t>16.04.2026</a:t>
+              <a:t>30.04.2026</a:t>
             </a:fld>
             <a:endParaRPr lang="ru-RU"/>
           </a:p>
@@ -3060,7 +3058,7 @@
           <a:p>
             <a:fld id="{D4C78990-BC74-4702-B11E-A02B45A34803}" type="datetimeFigureOut">
               <a:rPr lang="ru-RU" smtClean="0"/>
-              <a:t>16.04.2026</a:t>
+              <a:t>30.04.2026</a:t>
             </a:fld>
             <a:endParaRPr lang="ru-RU"/>
           </a:p>
@@ -3302,7 +3300,7 @@
           <a:p>
             <a:fld id="{D4C78990-BC74-4702-B11E-A02B45A34803}" type="datetimeFigureOut">
               <a:rPr lang="ru-RU" smtClean="0"/>
-              <a:t>16.04.2026</a:t>
+              <a:t>30.04.2026</a:t>
             </a:fld>
             <a:endParaRPr lang="ru-RU"/>
           </a:p>
@@ -4639,8 +4637,8 @@
           <a:chExt cx="0" cy="0"/>
         </a:xfrm>
       </p:grpSpPr>
-      <mc:AlternateContent xmlns:mc="http://schemas.openxmlformats.org/markup-compatibility/2006" xmlns:a14="http://schemas.microsoft.com/office/drawing/2010/main">
-        <mc:Choice Requires="a14">
+      <mc:AlternateContent xmlns:mc="http://schemas.openxmlformats.org/markup-compatibility/2006">
+        <mc:Choice xmlns:a14="http://schemas.microsoft.com/office/drawing/2010/main" Requires="a14">
           <p:sp>
             <p:nvSpPr>
               <p:cNvPr id="3" name="TextBox 2">
@@ -4712,7 +4710,22 @@
                     <a:latin typeface="Times New Roman" panose="02020603050405020304" pitchFamily="18" charset="0"/>
                     <a:ea typeface="Calibri" panose="020F0502020204030204" pitchFamily="34" charset="0"/>
                   </a:rPr>
-                  <a:t>В 96% конфигураций различия статистически значимы на уровне 0,1%;</a:t>
+                  <a:t>В </a:t>
+                </a:r>
+                <a:r>
+                  <a:rPr lang="ru-RU" dirty="0">
+                    <a:latin typeface="Times New Roman" panose="02020603050405020304" pitchFamily="18" charset="0"/>
+                    <a:ea typeface="Calibri" panose="020F0502020204030204" pitchFamily="34" charset="0"/>
+                  </a:rPr>
+                  <a:t>84</a:t>
+                </a:r>
+                <a:r>
+                  <a:rPr lang="ru-RU" sz="1800" dirty="0">
+                    <a:effectLst/>
+                    <a:latin typeface="Times New Roman" panose="02020603050405020304" pitchFamily="18" charset="0"/>
+                    <a:ea typeface="Calibri" panose="020F0502020204030204" pitchFamily="34" charset="0"/>
+                  </a:rPr>
+                  <a:t>% конфигураций различия статистически значимы на уровне 0,1%;</a:t>
                 </a:r>
                 <a:endParaRPr lang="ru-RU" sz="1800" dirty="0">
                   <a:effectLst/>
@@ -4847,7 +4860,7 @@
             </p:txBody>
           </p:sp>
         </mc:Choice>
-        <mc:Fallback xmlns="">
+        <mc:Fallback>
           <p:sp>
             <p:nvSpPr>
               <p:cNvPr id="3" name="TextBox 2">
@@ -5824,8 +5837,8 @@
           </a:p>
         </p:txBody>
       </p:sp>
-      <mc:AlternateContent xmlns:mc="http://schemas.openxmlformats.org/markup-compatibility/2006">
-        <mc:Choice xmlns:a14="http://schemas.microsoft.com/office/drawing/2010/main" Requires="a14">
+      <mc:AlternateContent xmlns:mc="http://schemas.openxmlformats.org/markup-compatibility/2006" xmlns:a14="http://schemas.microsoft.com/office/drawing/2010/main">
+        <mc:Choice Requires="a14">
           <p:graphicFrame>
             <p:nvGraphicFramePr>
               <p:cNvPr id="2" name="Таблица 3">
@@ -5841,7 +5854,7 @@
               <p:nvPr>
                 <p:extLst>
                   <p:ext uri="{D42A27DB-BD31-4B8C-83A1-F6EECF244321}">
-                    <p14:modId xmlns:p14="http://schemas.microsoft.com/office/powerpoint/2010/main" val="377333928"/>
+                    <p14:modId xmlns:p14="http://schemas.microsoft.com/office/powerpoint/2010/main" val="1941678848"/>
                   </p:ext>
                 </p:extLst>
               </p:nvPr>
@@ -5901,7 +5914,7 @@
                             </a:spcAft>
                           </a:pPr>
                           <a:r>
-                            <a:rPr lang="en-US" sz="1400" b="1" dirty="0">
+                            <a:rPr lang="ru-RU" sz="1400" b="1" dirty="0">
                               <a:solidFill>
                                 <a:schemeClr val="tx1"/>
                               </a:solidFill>
@@ -5910,20 +5923,11 @@
                               <a:ea typeface="Calibri" panose="020F0502020204030204" pitchFamily="34" charset="0"/>
                               <a:cs typeface="Times New Roman" panose="02020603050405020304" pitchFamily="18" charset="0"/>
                             </a:rPr>
-                            <a:t>Method</a:t>
+                            <a:t>Метод</a:t>
                           </a:r>
-                          <a:endParaRPr lang="ru-RU" sz="1400" b="1" dirty="0">
-                            <a:solidFill>
-                              <a:schemeClr val="tx1"/>
-                            </a:solidFill>
-                            <a:effectLst/>
-                            <a:latin typeface="Times New Roman" panose="02020603050405020304" pitchFamily="18" charset="0"/>
-                            <a:ea typeface="Calibri" panose="020F0502020204030204" pitchFamily="34" charset="0"/>
-                            <a:cs typeface="Times New Roman" panose="02020603050405020304" pitchFamily="18" charset="0"/>
-                          </a:endParaRPr>
                         </a:p>
                       </a:txBody>
-                      <a:tcPr marL="68580" marR="68580" marT="0" marB="0" anchor="ctr"/>
+                      <a:tcPr marL="0" marR="0" marT="0" marB="0" anchor="ctr"/>
                     </a:tc>
                     <a:tc>
                       <a:txBody>
@@ -6013,7 +6017,7 @@
                           </a:endParaRPr>
                         </a:p>
                       </a:txBody>
-                      <a:tcPr marL="68580" marR="68580" marT="0" marB="0" anchor="ctr"/>
+                      <a:tcPr marL="0" marR="0" marT="0" marB="0" anchor="ctr"/>
                     </a:tc>
                     <a:tc>
                       <a:txBody>
@@ -6091,7 +6095,7 @@
                           </a:endParaRPr>
                         </a:p>
                       </a:txBody>
-                      <a:tcPr marL="68580" marR="68580" marT="0" marB="0" anchor="ctr"/>
+                      <a:tcPr marL="0" marR="0" marT="0" marB="0" anchor="ctr"/>
                     </a:tc>
                     <a:tc>
                       <a:txBody>
@@ -6169,7 +6173,7 @@
                           </a:endParaRPr>
                         </a:p>
                       </a:txBody>
-                      <a:tcPr marL="68580" marR="68580" marT="0" marB="0" anchor="ctr"/>
+                      <a:tcPr marL="0" marR="0" marT="0" marB="0" anchor="ctr"/>
                     </a:tc>
                     <a:extLst>
                       <a:ext uri="{0D108BD9-81ED-4DB2-BD59-A6C34878D82A}">
@@ -6192,17 +6196,32 @@
                             </a:spcAft>
                           </a:pPr>
                           <a:r>
-                            <a:rPr lang="ru-RU" sz="1400">
+                            <a:rPr lang="ru-RU" sz="1400" dirty="0">
                               <a:effectLst/>
                               <a:latin typeface="Times New Roman" panose="02020603050405020304" pitchFamily="18" charset="0"/>
                               <a:ea typeface="Calibri" panose="020F0502020204030204" pitchFamily="34" charset="0"/>
                               <a:cs typeface="Times New Roman" panose="02020603050405020304" pitchFamily="18" charset="0"/>
                             </a:rPr>
-                            <a:t>Правило Сильвермана</a:t>
+                            <a:t>Правило </a:t>
                           </a:r>
+                          <a:r>
+                            <a:rPr lang="ru-RU" sz="1400" dirty="0" err="1">
+                              <a:effectLst/>
+                              <a:latin typeface="Times New Roman" panose="02020603050405020304" pitchFamily="18" charset="0"/>
+                              <a:ea typeface="Calibri" panose="020F0502020204030204" pitchFamily="34" charset="0"/>
+                              <a:cs typeface="Times New Roman" panose="02020603050405020304" pitchFamily="18" charset="0"/>
+                            </a:rPr>
+                            <a:t>Сильвермана</a:t>
+                          </a:r>
+                          <a:endParaRPr lang="ru-RU" sz="1400" dirty="0">
+                            <a:effectLst/>
+                            <a:latin typeface="Times New Roman" panose="02020603050405020304" pitchFamily="18" charset="0"/>
+                            <a:ea typeface="Calibri" panose="020F0502020204030204" pitchFamily="34" charset="0"/>
+                            <a:cs typeface="Times New Roman" panose="02020603050405020304" pitchFamily="18" charset="0"/>
+                          </a:endParaRPr>
                         </a:p>
                       </a:txBody>
-                      <a:tcPr marL="68580" marR="68580" marT="0" marB="0" anchor="ctr"/>
+                      <a:tcPr marL="0" marR="0" marT="0" marB="0" anchor="ctr"/>
                     </a:tc>
                     <a:tc>
                       <a:txBody>
@@ -6217,18 +6236,33 @@
                               <a:spcPts val="800"/>
                             </a:spcAft>
                           </a:pPr>
-                          <a:r>
-                            <a:rPr lang="ru-RU" sz="1400" dirty="0">
-                              <a:effectLst/>
-                              <a:latin typeface="Times New Roman" panose="02020603050405020304" pitchFamily="18" charset="0"/>
-                              <a:ea typeface="Calibri" panose="020F0502020204030204" pitchFamily="34" charset="0"/>
-                              <a:cs typeface="Times New Roman" panose="02020603050405020304" pitchFamily="18" charset="0"/>
-                            </a:rPr>
-                            <a:t>0.385714</a:t>
-                          </a:r>
+                          <a14:m>
+                            <m:oMathPara xmlns:m="http://schemas.openxmlformats.org/officeDocument/2006/math">
+                              <m:oMathParaPr>
+                                <m:jc m:val="centerGroup"/>
+                              </m:oMathParaPr>
+                              <m:oMath xmlns:m="http://schemas.openxmlformats.org/officeDocument/2006/math">
+                                <m:r>
+                                  <a:rPr lang="ru-RU" sz="1400" i="1" dirty="0" smtClean="0">
+                                    <a:effectLst/>
+                                    <a:latin typeface="Cambria Math" panose="02040503050406030204" pitchFamily="18" charset="0"/>
+                                    <a:ea typeface="Calibri" panose="020F0502020204030204" pitchFamily="34" charset="0"/>
+                                    <a:cs typeface="Times New Roman" panose="02020603050405020304" pitchFamily="18" charset="0"/>
+                                  </a:rPr>
+                                  <m:t>0.386</m:t>
+                                </m:r>
+                              </m:oMath>
+                            </m:oMathPara>
+                          </a14:m>
+                          <a:endParaRPr lang="ru-RU" sz="1400" dirty="0">
+                            <a:effectLst/>
+                            <a:latin typeface="Times New Roman" panose="02020603050405020304" pitchFamily="18" charset="0"/>
+                            <a:ea typeface="Calibri" panose="020F0502020204030204" pitchFamily="34" charset="0"/>
+                            <a:cs typeface="Times New Roman" panose="02020603050405020304" pitchFamily="18" charset="0"/>
+                          </a:endParaRPr>
                         </a:p>
                       </a:txBody>
-                      <a:tcPr marL="68580" marR="68580" marT="0" marB="0" anchor="ctr"/>
+                      <a:tcPr marL="0" marR="0" marT="0" marB="0" anchor="ctr"/>
                     </a:tc>
                     <a:tc>
                       <a:txBody>
@@ -6243,18 +6277,33 @@
                               <a:spcPts val="800"/>
                             </a:spcAft>
                           </a:pPr>
-                          <a:r>
-                            <a:rPr lang="ru-RU" sz="1400">
-                              <a:effectLst/>
-                              <a:latin typeface="Times New Roman" panose="02020603050405020304" pitchFamily="18" charset="0"/>
-                              <a:ea typeface="Calibri" panose="020F0502020204030204" pitchFamily="34" charset="0"/>
-                              <a:cs typeface="Times New Roman" panose="02020603050405020304" pitchFamily="18" charset="0"/>
-                            </a:rPr>
-                            <a:t>0.305371</a:t>
-                          </a:r>
+                          <a14:m>
+                            <m:oMathPara xmlns:m="http://schemas.openxmlformats.org/officeDocument/2006/math">
+                              <m:oMathParaPr>
+                                <m:jc m:val="centerGroup"/>
+                              </m:oMathParaPr>
+                              <m:oMath xmlns:m="http://schemas.openxmlformats.org/officeDocument/2006/math">
+                                <m:r>
+                                  <a:rPr lang="ru-RU" sz="1400" i="1" dirty="0" smtClean="0">
+                                    <a:effectLst/>
+                                    <a:latin typeface="Cambria Math" panose="02040503050406030204" pitchFamily="18" charset="0"/>
+                                    <a:ea typeface="Calibri" panose="020F0502020204030204" pitchFamily="34" charset="0"/>
+                                    <a:cs typeface="Times New Roman" panose="02020603050405020304" pitchFamily="18" charset="0"/>
+                                  </a:rPr>
+                                  <m:t>0.305</m:t>
+                                </m:r>
+                              </m:oMath>
+                            </m:oMathPara>
+                          </a14:m>
+                          <a:endParaRPr lang="ru-RU" sz="1400" dirty="0">
+                            <a:effectLst/>
+                            <a:latin typeface="Times New Roman" panose="02020603050405020304" pitchFamily="18" charset="0"/>
+                            <a:ea typeface="Calibri" panose="020F0502020204030204" pitchFamily="34" charset="0"/>
+                            <a:cs typeface="Times New Roman" panose="02020603050405020304" pitchFamily="18" charset="0"/>
+                          </a:endParaRPr>
                         </a:p>
                       </a:txBody>
-                      <a:tcPr marL="68580" marR="68580" marT="0" marB="0" anchor="ctr"/>
+                      <a:tcPr marL="0" marR="0" marT="0" marB="0" anchor="ctr"/>
                     </a:tc>
                     <a:tc>
                       <a:txBody>
@@ -6269,18 +6318,33 @@
                               <a:spcPts val="800"/>
                             </a:spcAft>
                           </a:pPr>
-                          <a:r>
-                            <a:rPr lang="ru-RU" sz="1400" b="1" dirty="0">
-                              <a:effectLst/>
-                              <a:latin typeface="Times New Roman" panose="02020603050405020304" pitchFamily="18" charset="0"/>
-                              <a:ea typeface="Calibri" panose="020F0502020204030204" pitchFamily="34" charset="0"/>
-                              <a:cs typeface="Times New Roman" panose="02020603050405020304" pitchFamily="18" charset="0"/>
-                            </a:rPr>
-                            <a:t>1.040429</a:t>
-                          </a:r>
+                          <a14:m>
+                            <m:oMathPara xmlns:m="http://schemas.openxmlformats.org/officeDocument/2006/math">
+                              <m:oMathParaPr>
+                                <m:jc m:val="centerGroup"/>
+                              </m:oMathParaPr>
+                              <m:oMath xmlns:m="http://schemas.openxmlformats.org/officeDocument/2006/math">
+                                <m:r>
+                                  <a:rPr lang="ru-RU" sz="1400" i="1" dirty="0" smtClean="0">
+                                    <a:effectLst/>
+                                    <a:latin typeface="Cambria Math" panose="02040503050406030204" pitchFamily="18" charset="0"/>
+                                    <a:ea typeface="Calibri" panose="020F0502020204030204" pitchFamily="34" charset="0"/>
+                                    <a:cs typeface="Times New Roman" panose="02020603050405020304" pitchFamily="18" charset="0"/>
+                                  </a:rPr>
+                                  <m:t>1.040</m:t>
+                                </m:r>
+                              </m:oMath>
+                            </m:oMathPara>
+                          </a14:m>
+                          <a:endParaRPr lang="ru-RU" sz="1400" dirty="0">
+                            <a:effectLst/>
+                            <a:latin typeface="Times New Roman" panose="02020603050405020304" pitchFamily="18" charset="0"/>
+                            <a:ea typeface="Calibri" panose="020F0502020204030204" pitchFamily="34" charset="0"/>
+                            <a:cs typeface="Times New Roman" panose="02020603050405020304" pitchFamily="18" charset="0"/>
+                          </a:endParaRPr>
                         </a:p>
                       </a:txBody>
-                      <a:tcPr marL="68580" marR="68580" marT="0" marB="0" anchor="ctr"/>
+                      <a:tcPr marL="0" marR="0" marT="0" marB="0" anchor="ctr"/>
                     </a:tc>
                     <a:extLst>
                       <a:ext uri="{0D108BD9-81ED-4DB2-BD59-A6C34878D82A}">
@@ -6328,7 +6392,7 @@
                           </a:endParaRPr>
                         </a:p>
                       </a:txBody>
-                      <a:tcPr marL="68580" marR="68580" marT="0" marB="0" anchor="ctr"/>
+                      <a:tcPr marL="0" marR="0" marT="0" marB="0" anchor="ctr"/>
                     </a:tc>
                     <a:tc>
                       <a:txBody>
@@ -6343,18 +6407,33 @@
                               <a:spcPts val="800"/>
                             </a:spcAft>
                           </a:pPr>
-                          <a:r>
-                            <a:rPr lang="ru-RU" sz="1400">
-                              <a:effectLst/>
-                              <a:latin typeface="Times New Roman" panose="02020603050405020304" pitchFamily="18" charset="0"/>
-                              <a:ea typeface="Calibri" panose="020F0502020204030204" pitchFamily="34" charset="0"/>
-                              <a:cs typeface="Times New Roman" panose="02020603050405020304" pitchFamily="18" charset="0"/>
-                            </a:rPr>
-                            <a:t>0.377969</a:t>
-                          </a:r>
+                          <a14:m>
+                            <m:oMathPara xmlns:m="http://schemas.openxmlformats.org/officeDocument/2006/math">
+                              <m:oMathParaPr>
+                                <m:jc m:val="centerGroup"/>
+                              </m:oMathParaPr>
+                              <m:oMath xmlns:m="http://schemas.openxmlformats.org/officeDocument/2006/math">
+                                <m:r>
+                                  <a:rPr lang="ru-RU" sz="1400" i="1" dirty="0" smtClean="0">
+                                    <a:effectLst/>
+                                    <a:latin typeface="Cambria Math" panose="02040503050406030204" pitchFamily="18" charset="0"/>
+                                    <a:ea typeface="Calibri" panose="020F0502020204030204" pitchFamily="34" charset="0"/>
+                                    <a:cs typeface="Times New Roman" panose="02020603050405020304" pitchFamily="18" charset="0"/>
+                                  </a:rPr>
+                                  <m:t>0.378</m:t>
+                                </m:r>
+                              </m:oMath>
+                            </m:oMathPara>
+                          </a14:m>
+                          <a:endParaRPr lang="ru-RU" sz="1400" dirty="0">
+                            <a:effectLst/>
+                            <a:latin typeface="Times New Roman" panose="02020603050405020304" pitchFamily="18" charset="0"/>
+                            <a:ea typeface="Calibri" panose="020F0502020204030204" pitchFamily="34" charset="0"/>
+                            <a:cs typeface="Times New Roman" panose="02020603050405020304" pitchFamily="18" charset="0"/>
+                          </a:endParaRPr>
                         </a:p>
                       </a:txBody>
-                      <a:tcPr marL="68580" marR="68580" marT="0" marB="0" anchor="ctr"/>
+                      <a:tcPr marL="0" marR="0" marT="0" marB="0" anchor="ctr"/>
                     </a:tc>
                     <a:tc>
                       <a:txBody>
@@ -6369,18 +6448,33 @@
                               <a:spcPts val="800"/>
                             </a:spcAft>
                           </a:pPr>
-                          <a:r>
-                            <a:rPr lang="ru-RU" sz="1400" dirty="0">
-                              <a:effectLst/>
-                              <a:latin typeface="Times New Roman" panose="02020603050405020304" pitchFamily="18" charset="0"/>
-                              <a:ea typeface="Calibri" panose="020F0502020204030204" pitchFamily="34" charset="0"/>
-                              <a:cs typeface="Times New Roman" panose="02020603050405020304" pitchFamily="18" charset="0"/>
-                            </a:rPr>
-                            <a:t>0.296663</a:t>
-                          </a:r>
+                          <a14:m>
+                            <m:oMathPara xmlns:m="http://schemas.openxmlformats.org/officeDocument/2006/math">
+                              <m:oMathParaPr>
+                                <m:jc m:val="centerGroup"/>
+                              </m:oMathParaPr>
+                              <m:oMath xmlns:m="http://schemas.openxmlformats.org/officeDocument/2006/math">
+                                <m:r>
+                                  <a:rPr lang="ru-RU" sz="1400" i="1" dirty="0" smtClean="0">
+                                    <a:effectLst/>
+                                    <a:latin typeface="Cambria Math" panose="02040503050406030204" pitchFamily="18" charset="0"/>
+                                    <a:ea typeface="Calibri" panose="020F0502020204030204" pitchFamily="34" charset="0"/>
+                                    <a:cs typeface="Times New Roman" panose="02020603050405020304" pitchFamily="18" charset="0"/>
+                                  </a:rPr>
+                                  <m:t>0.297</m:t>
+                                </m:r>
+                              </m:oMath>
+                            </m:oMathPara>
+                          </a14:m>
+                          <a:endParaRPr lang="ru-RU" sz="1400" dirty="0">
+                            <a:effectLst/>
+                            <a:latin typeface="Times New Roman" panose="02020603050405020304" pitchFamily="18" charset="0"/>
+                            <a:ea typeface="Calibri" panose="020F0502020204030204" pitchFamily="34" charset="0"/>
+                            <a:cs typeface="Times New Roman" panose="02020603050405020304" pitchFamily="18" charset="0"/>
+                          </a:endParaRPr>
                         </a:p>
                       </a:txBody>
-                      <a:tcPr marL="68580" marR="68580" marT="0" marB="0" anchor="ctr"/>
+                      <a:tcPr marL="0" marR="0" marT="0" marB="0" anchor="ctr"/>
                     </a:tc>
                     <a:tc>
                       <a:txBody>
@@ -6395,18 +6489,33 @@
                               <a:spcPts val="800"/>
                             </a:spcAft>
                           </a:pPr>
-                          <a:r>
-                            <a:rPr lang="ru-RU" sz="1400">
-                              <a:effectLst/>
-                              <a:latin typeface="Times New Roman" panose="02020603050405020304" pitchFamily="18" charset="0"/>
-                              <a:ea typeface="Calibri" panose="020F0502020204030204" pitchFamily="34" charset="0"/>
-                              <a:cs typeface="Times New Roman" panose="02020603050405020304" pitchFamily="18" charset="0"/>
-                            </a:rPr>
-                            <a:t>1.087792</a:t>
-                          </a:r>
+                          <a14:m>
+                            <m:oMathPara xmlns:m="http://schemas.openxmlformats.org/officeDocument/2006/math">
+                              <m:oMathParaPr>
+                                <m:jc m:val="centerGroup"/>
+                              </m:oMathParaPr>
+                              <m:oMath xmlns:m="http://schemas.openxmlformats.org/officeDocument/2006/math">
+                                <m:r>
+                                  <a:rPr lang="ru-RU" sz="1400" i="1" dirty="0" smtClean="0">
+                                    <a:effectLst/>
+                                    <a:latin typeface="Cambria Math" panose="02040503050406030204" pitchFamily="18" charset="0"/>
+                                    <a:ea typeface="Calibri" panose="020F0502020204030204" pitchFamily="34" charset="0"/>
+                                    <a:cs typeface="Times New Roman" panose="02020603050405020304" pitchFamily="18" charset="0"/>
+                                  </a:rPr>
+                                  <m:t>1.088</m:t>
+                                </m:r>
+                              </m:oMath>
+                            </m:oMathPara>
+                          </a14:m>
+                          <a:endParaRPr lang="ru-RU" sz="1400" dirty="0">
+                            <a:effectLst/>
+                            <a:latin typeface="Times New Roman" panose="02020603050405020304" pitchFamily="18" charset="0"/>
+                            <a:ea typeface="Calibri" panose="020F0502020204030204" pitchFamily="34" charset="0"/>
+                            <a:cs typeface="Times New Roman" panose="02020603050405020304" pitchFamily="18" charset="0"/>
+                          </a:endParaRPr>
                         </a:p>
                       </a:txBody>
-                      <a:tcPr marL="68580" marR="68580" marT="0" marB="0" anchor="ctr"/>
+                      <a:tcPr marL="0" marR="0" marT="0" marB="0" anchor="ctr"/>
                     </a:tc>
                     <a:extLst>
                       <a:ext uri="{0D108BD9-81ED-4DB2-BD59-A6C34878D82A}">
@@ -6445,7 +6554,7 @@
                           </a:endParaRPr>
                         </a:p>
                       </a:txBody>
-                      <a:tcPr marL="68580" marR="68580" marT="0" marB="0" anchor="ctr"/>
+                      <a:tcPr marL="0" marR="0" marT="0" marB="0" anchor="ctr"/>
                     </a:tc>
                     <a:tc>
                       <a:txBody>
@@ -6460,18 +6569,33 @@
                               <a:spcPts val="800"/>
                             </a:spcAft>
                           </a:pPr>
-                          <a:r>
-                            <a:rPr lang="ru-RU" sz="1400" b="1" dirty="0">
-                              <a:effectLst/>
-                              <a:latin typeface="Times New Roman" panose="02020603050405020304" pitchFamily="18" charset="0"/>
-                              <a:ea typeface="Calibri" panose="020F0502020204030204" pitchFamily="34" charset="0"/>
-                              <a:cs typeface="Times New Roman" panose="02020603050405020304" pitchFamily="18" charset="0"/>
-                            </a:rPr>
-                            <a:t>0.377177</a:t>
-                          </a:r>
+                          <a14:m>
+                            <m:oMathPara xmlns:m="http://schemas.openxmlformats.org/officeDocument/2006/math">
+                              <m:oMathParaPr>
+                                <m:jc m:val="centerGroup"/>
+                              </m:oMathParaPr>
+                              <m:oMath xmlns:m="http://schemas.openxmlformats.org/officeDocument/2006/math">
+                                <m:r>
+                                  <a:rPr lang="ru-RU" sz="1400" i="1" dirty="0" smtClean="0">
+                                    <a:effectLst/>
+                                    <a:latin typeface="Cambria Math" panose="02040503050406030204" pitchFamily="18" charset="0"/>
+                                    <a:ea typeface="Calibri" panose="020F0502020204030204" pitchFamily="34" charset="0"/>
+                                    <a:cs typeface="Times New Roman" panose="02020603050405020304" pitchFamily="18" charset="0"/>
+                                  </a:rPr>
+                                  <m:t>0.378</m:t>
+                                </m:r>
+                              </m:oMath>
+                            </m:oMathPara>
+                          </a14:m>
+                          <a:endParaRPr lang="ru-RU" sz="1400" dirty="0">
+                            <a:effectLst/>
+                            <a:latin typeface="Times New Roman" panose="02020603050405020304" pitchFamily="18" charset="0"/>
+                            <a:ea typeface="Calibri" panose="020F0502020204030204" pitchFamily="34" charset="0"/>
+                            <a:cs typeface="Times New Roman" panose="02020603050405020304" pitchFamily="18" charset="0"/>
+                          </a:endParaRPr>
                         </a:p>
                       </a:txBody>
-                      <a:tcPr marL="68580" marR="68580" marT="0" marB="0" anchor="ctr"/>
+                      <a:tcPr marL="0" marR="0" marT="0" marB="0" anchor="ctr"/>
                     </a:tc>
                     <a:tc>
                       <a:txBody>
@@ -6486,18 +6610,33 @@
                               <a:spcPts val="800"/>
                             </a:spcAft>
                           </a:pPr>
-                          <a:r>
-                            <a:rPr lang="ru-RU" sz="1400" b="1" dirty="0">
-                              <a:effectLst/>
-                              <a:latin typeface="Times New Roman" panose="02020603050405020304" pitchFamily="18" charset="0"/>
-                              <a:ea typeface="Calibri" panose="020F0502020204030204" pitchFamily="34" charset="0"/>
-                              <a:cs typeface="Times New Roman" panose="02020603050405020304" pitchFamily="18" charset="0"/>
-                            </a:rPr>
-                            <a:t>0.296323</a:t>
-                          </a:r>
+                          <a14:m>
+                            <m:oMathPara xmlns:m="http://schemas.openxmlformats.org/officeDocument/2006/math">
+                              <m:oMathParaPr>
+                                <m:jc m:val="centerGroup"/>
+                              </m:oMathParaPr>
+                              <m:oMath xmlns:m="http://schemas.openxmlformats.org/officeDocument/2006/math">
+                                <m:r>
+                                  <a:rPr lang="ru-RU" sz="1400" i="1" dirty="0" smtClean="0">
+                                    <a:effectLst/>
+                                    <a:latin typeface="Cambria Math" panose="02040503050406030204" pitchFamily="18" charset="0"/>
+                                    <a:ea typeface="Calibri" panose="020F0502020204030204" pitchFamily="34" charset="0"/>
+                                    <a:cs typeface="Times New Roman" panose="02020603050405020304" pitchFamily="18" charset="0"/>
+                                  </a:rPr>
+                                  <m:t>0.296</m:t>
+                                </m:r>
+                              </m:oMath>
+                            </m:oMathPara>
+                          </a14:m>
+                          <a:endParaRPr lang="ru-RU" sz="1400" dirty="0">
+                            <a:effectLst/>
+                            <a:latin typeface="Times New Roman" panose="02020603050405020304" pitchFamily="18" charset="0"/>
+                            <a:ea typeface="Calibri" panose="020F0502020204030204" pitchFamily="34" charset="0"/>
+                            <a:cs typeface="Times New Roman" panose="02020603050405020304" pitchFamily="18" charset="0"/>
+                          </a:endParaRPr>
                         </a:p>
                       </a:txBody>
-                      <a:tcPr marL="68580" marR="68580" marT="0" marB="0" anchor="ctr"/>
+                      <a:tcPr marL="0" marR="0" marT="0" marB="0" anchor="ctr"/>
                     </a:tc>
                     <a:tc>
                       <a:txBody>
@@ -6512,18 +6651,33 @@
                               <a:spcPts val="800"/>
                             </a:spcAft>
                           </a:pPr>
-                          <a:r>
-                            <a:rPr lang="ru-RU" sz="1400" dirty="0">
-                              <a:effectLst/>
-                              <a:latin typeface="Times New Roman" panose="02020603050405020304" pitchFamily="18" charset="0"/>
-                              <a:ea typeface="Calibri" panose="020F0502020204030204" pitchFamily="34" charset="0"/>
-                              <a:cs typeface="Times New Roman" panose="02020603050405020304" pitchFamily="18" charset="0"/>
-                            </a:rPr>
-                            <a:t>1.088225</a:t>
-                          </a:r>
+                          <a14:m>
+                            <m:oMathPara xmlns:m="http://schemas.openxmlformats.org/officeDocument/2006/math">
+                              <m:oMathParaPr>
+                                <m:jc m:val="centerGroup"/>
+                              </m:oMathParaPr>
+                              <m:oMath xmlns:m="http://schemas.openxmlformats.org/officeDocument/2006/math">
+                                <m:r>
+                                  <a:rPr lang="ru-RU" sz="1400" i="1" dirty="0" smtClean="0">
+                                    <a:effectLst/>
+                                    <a:latin typeface="Cambria Math" panose="02040503050406030204" pitchFamily="18" charset="0"/>
+                                    <a:ea typeface="Calibri" panose="020F0502020204030204" pitchFamily="34" charset="0"/>
+                                    <a:cs typeface="Times New Roman" panose="02020603050405020304" pitchFamily="18" charset="0"/>
+                                  </a:rPr>
+                                  <m:t>1.088</m:t>
+                                </m:r>
+                              </m:oMath>
+                            </m:oMathPara>
+                          </a14:m>
+                          <a:endParaRPr lang="ru-RU" sz="1400" dirty="0">
+                            <a:effectLst/>
+                            <a:latin typeface="Times New Roman" panose="02020603050405020304" pitchFamily="18" charset="0"/>
+                            <a:ea typeface="Calibri" panose="020F0502020204030204" pitchFamily="34" charset="0"/>
+                            <a:cs typeface="Times New Roman" panose="02020603050405020304" pitchFamily="18" charset="0"/>
+                          </a:endParaRPr>
                         </a:p>
                       </a:txBody>
-                      <a:tcPr marL="68580" marR="68580" marT="0" marB="0" anchor="ctr"/>
+                      <a:tcPr marL="0" marR="0" marT="0" marB="0" anchor="ctr"/>
                     </a:tc>
                     <a:extLst>
                       <a:ext uri="{0D108BD9-81ED-4DB2-BD59-A6C34878D82A}">
@@ -6556,7 +6710,7 @@
                           </a:r>
                         </a:p>
                       </a:txBody>
-                      <a:tcPr marL="68580" marR="68580" marT="0" marB="0" anchor="ctr"/>
+                      <a:tcPr marL="0" marR="0" marT="0" marB="0" anchor="ctr"/>
                     </a:tc>
                     <a:tc>
                       <a:txBody>
@@ -6571,18 +6725,33 @@
                               <a:spcPts val="800"/>
                             </a:spcAft>
                           </a:pPr>
-                          <a:r>
-                            <a:rPr lang="ru-RU" sz="1400">
-                              <a:effectLst/>
-                              <a:latin typeface="Times New Roman" panose="02020603050405020304" pitchFamily="18" charset="0"/>
-                              <a:ea typeface="Calibri" panose="020F0502020204030204" pitchFamily="34" charset="0"/>
-                              <a:cs typeface="Times New Roman" panose="02020603050405020304" pitchFamily="18" charset="0"/>
-                            </a:rPr>
-                            <a:t>0.391797</a:t>
-                          </a:r>
+                          <a14:m>
+                            <m:oMathPara xmlns:m="http://schemas.openxmlformats.org/officeDocument/2006/math">
+                              <m:oMathParaPr>
+                                <m:jc m:val="centerGroup"/>
+                              </m:oMathParaPr>
+                              <m:oMath xmlns:m="http://schemas.openxmlformats.org/officeDocument/2006/math">
+                                <m:r>
+                                  <a:rPr lang="ru-RU" sz="1400" i="1" dirty="0" smtClean="0">
+                                    <a:effectLst/>
+                                    <a:latin typeface="Cambria Math" panose="02040503050406030204" pitchFamily="18" charset="0"/>
+                                    <a:ea typeface="Calibri" panose="020F0502020204030204" pitchFamily="34" charset="0"/>
+                                    <a:cs typeface="Times New Roman" panose="02020603050405020304" pitchFamily="18" charset="0"/>
+                                  </a:rPr>
+                                  <m:t>0.392</m:t>
+                                </m:r>
+                              </m:oMath>
+                            </m:oMathPara>
+                          </a14:m>
+                          <a:endParaRPr lang="ru-RU" sz="1400" dirty="0">
+                            <a:effectLst/>
+                            <a:latin typeface="Times New Roman" panose="02020603050405020304" pitchFamily="18" charset="0"/>
+                            <a:ea typeface="Calibri" panose="020F0502020204030204" pitchFamily="34" charset="0"/>
+                            <a:cs typeface="Times New Roman" panose="02020603050405020304" pitchFamily="18" charset="0"/>
+                          </a:endParaRPr>
                         </a:p>
                       </a:txBody>
-                      <a:tcPr marL="68580" marR="68580" marT="0" marB="0" anchor="ctr"/>
+                      <a:tcPr marL="0" marR="0" marT="0" marB="0" anchor="ctr"/>
                     </a:tc>
                     <a:tc>
                       <a:txBody>
@@ -6597,18 +6766,33 @@
                               <a:spcPts val="800"/>
                             </a:spcAft>
                           </a:pPr>
-                          <a:r>
-                            <a:rPr lang="ru-RU" sz="1400">
-                              <a:effectLst/>
-                              <a:latin typeface="Times New Roman" panose="02020603050405020304" pitchFamily="18" charset="0"/>
-                              <a:ea typeface="Calibri" panose="020F0502020204030204" pitchFamily="34" charset="0"/>
-                              <a:cs typeface="Times New Roman" panose="02020603050405020304" pitchFamily="18" charset="0"/>
-                            </a:rPr>
-                            <a:t>0.304396</a:t>
-                          </a:r>
+                          <a14:m>
+                            <m:oMathPara xmlns:m="http://schemas.openxmlformats.org/officeDocument/2006/math">
+                              <m:oMathParaPr>
+                                <m:jc m:val="centerGroup"/>
+                              </m:oMathParaPr>
+                              <m:oMath xmlns:m="http://schemas.openxmlformats.org/officeDocument/2006/math">
+                                <m:r>
+                                  <a:rPr lang="ru-RU" sz="1400" i="1" dirty="0" smtClean="0">
+                                    <a:effectLst/>
+                                    <a:latin typeface="Cambria Math" panose="02040503050406030204" pitchFamily="18" charset="0"/>
+                                    <a:ea typeface="Calibri" panose="020F0502020204030204" pitchFamily="34" charset="0"/>
+                                    <a:cs typeface="Times New Roman" panose="02020603050405020304" pitchFamily="18" charset="0"/>
+                                  </a:rPr>
+                                  <m:t>0.304</m:t>
+                                </m:r>
+                              </m:oMath>
+                            </m:oMathPara>
+                          </a14:m>
+                          <a:endParaRPr lang="ru-RU" sz="1400" dirty="0">
+                            <a:effectLst/>
+                            <a:latin typeface="Times New Roman" panose="02020603050405020304" pitchFamily="18" charset="0"/>
+                            <a:ea typeface="Calibri" panose="020F0502020204030204" pitchFamily="34" charset="0"/>
+                            <a:cs typeface="Times New Roman" panose="02020603050405020304" pitchFamily="18" charset="0"/>
+                          </a:endParaRPr>
                         </a:p>
                       </a:txBody>
-                      <a:tcPr marL="68580" marR="68580" marT="0" marB="0" anchor="ctr"/>
+                      <a:tcPr marL="0" marR="0" marT="0" marB="0" anchor="ctr"/>
                     </a:tc>
                     <a:tc>
                       <a:txBody>
@@ -6623,18 +6807,33 @@
                               <a:spcPts val="800"/>
                             </a:spcAft>
                           </a:pPr>
-                          <a:r>
-                            <a:rPr lang="ru-RU" sz="1400" dirty="0">
-                              <a:effectLst/>
-                              <a:latin typeface="Times New Roman" panose="02020603050405020304" pitchFamily="18" charset="0"/>
-                              <a:ea typeface="Calibri" panose="020F0502020204030204" pitchFamily="34" charset="0"/>
-                              <a:cs typeface="Times New Roman" panose="02020603050405020304" pitchFamily="18" charset="0"/>
-                            </a:rPr>
-                            <a:t>1.079564</a:t>
-                          </a:r>
+                          <a14:m>
+                            <m:oMathPara xmlns:m="http://schemas.openxmlformats.org/officeDocument/2006/math">
+                              <m:oMathParaPr>
+                                <m:jc m:val="centerGroup"/>
+                              </m:oMathParaPr>
+                              <m:oMath xmlns:m="http://schemas.openxmlformats.org/officeDocument/2006/math">
+                                <m:r>
+                                  <a:rPr lang="ru-RU" sz="1400" i="1" dirty="0" smtClean="0">
+                                    <a:effectLst/>
+                                    <a:latin typeface="Cambria Math" panose="02040503050406030204" pitchFamily="18" charset="0"/>
+                                    <a:ea typeface="Calibri" panose="020F0502020204030204" pitchFamily="34" charset="0"/>
+                                    <a:cs typeface="Times New Roman" panose="02020603050405020304" pitchFamily="18" charset="0"/>
+                                  </a:rPr>
+                                  <m:t>1.080</m:t>
+                                </m:r>
+                              </m:oMath>
+                            </m:oMathPara>
+                          </a14:m>
+                          <a:endParaRPr lang="ru-RU" sz="1400" dirty="0">
+                            <a:effectLst/>
+                            <a:latin typeface="Times New Roman" panose="02020603050405020304" pitchFamily="18" charset="0"/>
+                            <a:ea typeface="Calibri" panose="020F0502020204030204" pitchFamily="34" charset="0"/>
+                            <a:cs typeface="Times New Roman" panose="02020603050405020304" pitchFamily="18" charset="0"/>
+                          </a:endParaRPr>
                         </a:p>
                       </a:txBody>
-                      <a:tcPr marL="68580" marR="68580" marT="0" marB="0" anchor="ctr"/>
+                      <a:tcPr marL="0" marR="0" marT="0" marB="0" anchor="ctr"/>
                     </a:tc>
                     <a:extLst>
                       <a:ext uri="{0D108BD9-81ED-4DB2-BD59-A6C34878D82A}">
@@ -6647,7 +6846,7 @@
             </a:graphic>
           </p:graphicFrame>
         </mc:Choice>
-        <mc:Fallback>
+        <mc:Fallback xmlns="">
           <p:graphicFrame>
             <p:nvGraphicFramePr>
               <p:cNvPr id="2" name="Таблица 3">
@@ -6663,7 +6862,7 @@
               <p:nvPr>
                 <p:extLst>
                   <p:ext uri="{D42A27DB-BD31-4B8C-83A1-F6EECF244321}">
-                    <p14:modId xmlns:p14="http://schemas.microsoft.com/office/powerpoint/2010/main" val="377333928"/>
+                    <p14:modId xmlns:p14="http://schemas.microsoft.com/office/powerpoint/2010/main" val="1941678848"/>
                   </p:ext>
                 </p:extLst>
               </p:nvPr>
@@ -6723,7 +6922,7 @@
                             </a:spcAft>
                           </a:pPr>
                           <a:r>
-                            <a:rPr lang="en-US" sz="1400" b="1" dirty="0">
+                            <a:rPr lang="ru-RU" sz="1400" b="1" dirty="0">
                               <a:solidFill>
                                 <a:schemeClr val="tx1"/>
                               </a:solidFill>
@@ -6732,20 +6931,11 @@
                               <a:ea typeface="Calibri" panose="020F0502020204030204" pitchFamily="34" charset="0"/>
                               <a:cs typeface="Times New Roman" panose="02020603050405020304" pitchFamily="18" charset="0"/>
                             </a:rPr>
-                            <a:t>Method</a:t>
+                            <a:t>Метод</a:t>
                           </a:r>
-                          <a:endParaRPr lang="ru-RU" sz="1400" b="1" dirty="0">
-                            <a:solidFill>
-                              <a:schemeClr val="tx1"/>
-                            </a:solidFill>
-                            <a:effectLst/>
-                            <a:latin typeface="Times New Roman" panose="02020603050405020304" pitchFamily="18" charset="0"/>
-                            <a:ea typeface="Calibri" panose="020F0502020204030204" pitchFamily="34" charset="0"/>
-                            <a:cs typeface="Times New Roman" panose="02020603050405020304" pitchFamily="18" charset="0"/>
-                          </a:endParaRPr>
                         </a:p>
                       </a:txBody>
-                      <a:tcPr marL="68580" marR="68580" marT="0" marB="0" anchor="ctr"/>
+                      <a:tcPr marL="0" marR="0" marT="0" marB="0" anchor="ctr"/>
                     </a:tc>
                     <a:tc>
                       <a:txBody>
@@ -6755,7 +6945,7 @@
                           <a:endParaRPr lang="ru-RU"/>
                         </a:p>
                       </a:txBody>
-                      <a:tcPr marL="68580" marR="68580" marT="0" marB="0" anchor="ctr">
+                      <a:tcPr marL="0" marR="0" marT="0" marB="0" anchor="ctr">
                         <a:blipFill>
                           <a:blip r:embed="rId2"/>
                           <a:stretch>
@@ -6772,7 +6962,7 @@
                           <a:endParaRPr lang="ru-RU"/>
                         </a:p>
                       </a:txBody>
-                      <a:tcPr marL="68580" marR="68580" marT="0" marB="0" anchor="ctr">
+                      <a:tcPr marL="0" marR="0" marT="0" marB="0" anchor="ctr">
                         <a:blipFill>
                           <a:blip r:embed="rId2"/>
                           <a:stretch>
@@ -6789,7 +6979,7 @@
                           <a:endParaRPr lang="ru-RU"/>
                         </a:p>
                       </a:txBody>
-                      <a:tcPr marL="68580" marR="68580" marT="0" marB="0" anchor="ctr">
+                      <a:tcPr marL="0" marR="0" marT="0" marB="0" anchor="ctr">
                         <a:blipFill>
                           <a:blip r:embed="rId2"/>
                           <a:stretch>
@@ -6819,95 +7009,83 @@
                             </a:spcAft>
                           </a:pPr>
                           <a:r>
-                            <a:rPr lang="ru-RU" sz="1400">
+                            <a:rPr lang="ru-RU" sz="1400" dirty="0">
                               <a:effectLst/>
                               <a:latin typeface="Times New Roman" panose="02020603050405020304" pitchFamily="18" charset="0"/>
                               <a:ea typeface="Calibri" panose="020F0502020204030204" pitchFamily="34" charset="0"/>
                               <a:cs typeface="Times New Roman" panose="02020603050405020304" pitchFamily="18" charset="0"/>
                             </a:rPr>
-                            <a:t>Правило Сильвермана</a:t>
+                            <a:t>Правило </a:t>
                           </a:r>
+                          <a:r>
+                            <a:rPr lang="ru-RU" sz="1400" dirty="0" err="1">
+                              <a:effectLst/>
+                              <a:latin typeface="Times New Roman" panose="02020603050405020304" pitchFamily="18" charset="0"/>
+                              <a:ea typeface="Calibri" panose="020F0502020204030204" pitchFamily="34" charset="0"/>
+                              <a:cs typeface="Times New Roman" panose="02020603050405020304" pitchFamily="18" charset="0"/>
+                            </a:rPr>
+                            <a:t>Сильвермана</a:t>
+                          </a:r>
+                          <a:endParaRPr lang="ru-RU" sz="1400" dirty="0">
+                            <a:effectLst/>
+                            <a:latin typeface="Times New Roman" panose="02020603050405020304" pitchFamily="18" charset="0"/>
+                            <a:ea typeface="Calibri" panose="020F0502020204030204" pitchFamily="34" charset="0"/>
+                            <a:cs typeface="Times New Roman" panose="02020603050405020304" pitchFamily="18" charset="0"/>
+                          </a:endParaRPr>
                         </a:p>
                       </a:txBody>
-                      <a:tcPr marL="68580" marR="68580" marT="0" marB="0" anchor="ctr"/>
+                      <a:tcPr marL="0" marR="0" marT="0" marB="0" anchor="ctr"/>
                     </a:tc>
                     <a:tc>
                       <a:txBody>
                         <a:bodyPr/>
                         <a:lstStyle/>
                         <a:p>
-                          <a:pPr indent="450215" algn="ctr">
-                            <a:lnSpc>
-                              <a:spcPct val="150000"/>
-                            </a:lnSpc>
-                            <a:spcAft>
-                              <a:spcPts val="800"/>
-                            </a:spcAft>
-                          </a:pPr>
-                          <a:r>
-                            <a:rPr lang="ru-RU" sz="1400" dirty="0">
-                              <a:effectLst/>
-                              <a:latin typeface="Times New Roman" panose="02020603050405020304" pitchFamily="18" charset="0"/>
-                              <a:ea typeface="Calibri" panose="020F0502020204030204" pitchFamily="34" charset="0"/>
-                              <a:cs typeface="Times New Roman" panose="02020603050405020304" pitchFamily="18" charset="0"/>
-                            </a:rPr>
-                            <a:t>0.385714</a:t>
-                          </a:r>
+                          <a:endParaRPr lang="ru-RU"/>
                         </a:p>
                       </a:txBody>
-                      <a:tcPr marL="68580" marR="68580" marT="0" marB="0" anchor="ctr"/>
+                      <a:tcPr marL="0" marR="0" marT="0" marB="0" anchor="ctr">
+                        <a:blipFill>
+                          <a:blip r:embed="rId2"/>
+                          <a:stretch>
+                            <a:fillRect l="-100222" t="-100000" r="-200887" b="-300000"/>
+                          </a:stretch>
+                        </a:blipFill>
+                      </a:tcPr>
                     </a:tc>
                     <a:tc>
                       <a:txBody>
                         <a:bodyPr/>
                         <a:lstStyle/>
                         <a:p>
-                          <a:pPr indent="450215" algn="ctr">
-                            <a:lnSpc>
-                              <a:spcPct val="150000"/>
-                            </a:lnSpc>
-                            <a:spcAft>
-                              <a:spcPts val="800"/>
-                            </a:spcAft>
-                          </a:pPr>
-                          <a:r>
-                            <a:rPr lang="ru-RU" sz="1400">
-                              <a:effectLst/>
-                              <a:latin typeface="Times New Roman" panose="02020603050405020304" pitchFamily="18" charset="0"/>
-                              <a:ea typeface="Calibri" panose="020F0502020204030204" pitchFamily="34" charset="0"/>
-                              <a:cs typeface="Times New Roman" panose="02020603050405020304" pitchFamily="18" charset="0"/>
-                            </a:rPr>
-                            <a:t>0.305371</a:t>
-                          </a:r>
+                          <a:endParaRPr lang="ru-RU"/>
                         </a:p>
                       </a:txBody>
-                      <a:tcPr marL="68580" marR="68580" marT="0" marB="0" anchor="ctr"/>
+                      <a:tcPr marL="0" marR="0" marT="0" marB="0" anchor="ctr">
+                        <a:blipFill>
+                          <a:blip r:embed="rId2"/>
+                          <a:stretch>
+                            <a:fillRect l="-200222" t="-100000" r="-100887" b="-300000"/>
+                          </a:stretch>
+                        </a:blipFill>
+                      </a:tcPr>
                     </a:tc>
                     <a:tc>
                       <a:txBody>
                         <a:bodyPr/>
                         <a:lstStyle/>
                         <a:p>
-                          <a:pPr indent="450215" algn="ctr">
-                            <a:lnSpc>
-                              <a:spcPct val="150000"/>
-                            </a:lnSpc>
-                            <a:spcAft>
-                              <a:spcPts val="800"/>
-                            </a:spcAft>
-                          </a:pPr>
-                          <a:r>
-                            <a:rPr lang="ru-RU" sz="1400" b="1" dirty="0">
-                              <a:effectLst/>
-                              <a:latin typeface="Times New Roman" panose="02020603050405020304" pitchFamily="18" charset="0"/>
-                              <a:ea typeface="Calibri" panose="020F0502020204030204" pitchFamily="34" charset="0"/>
-                              <a:cs typeface="Times New Roman" panose="02020603050405020304" pitchFamily="18" charset="0"/>
-                            </a:rPr>
-                            <a:t>1.040429</a:t>
-                          </a:r>
+                          <a:endParaRPr lang="ru-RU"/>
                         </a:p>
                       </a:txBody>
-                      <a:tcPr marL="68580" marR="68580" marT="0" marB="0" anchor="ctr"/>
+                      <a:tcPr marL="0" marR="0" marT="0" marB="0" anchor="ctr">
+                        <a:blipFill>
+                          <a:blip r:embed="rId2"/>
+                          <a:stretch>
+                            <a:fillRect l="-300222" t="-100000" r="-887" b="-300000"/>
+                          </a:stretch>
+                        </a:blipFill>
+                      </a:tcPr>
                     </a:tc>
                     <a:extLst>
                       <a:ext uri="{0D108BD9-81ED-4DB2-BD59-A6C34878D82A}">
@@ -6955,85 +7133,58 @@
                           </a:endParaRPr>
                         </a:p>
                       </a:txBody>
-                      <a:tcPr marL="68580" marR="68580" marT="0" marB="0" anchor="ctr"/>
+                      <a:tcPr marL="0" marR="0" marT="0" marB="0" anchor="ctr"/>
                     </a:tc>
                     <a:tc>
                       <a:txBody>
                         <a:bodyPr/>
                         <a:lstStyle/>
                         <a:p>
-                          <a:pPr indent="450215" algn="ctr">
-                            <a:lnSpc>
-                              <a:spcPct val="150000"/>
-                            </a:lnSpc>
-                            <a:spcAft>
-                              <a:spcPts val="800"/>
-                            </a:spcAft>
-                          </a:pPr>
-                          <a:r>
-                            <a:rPr lang="ru-RU" sz="1400">
-                              <a:effectLst/>
-                              <a:latin typeface="Times New Roman" panose="02020603050405020304" pitchFamily="18" charset="0"/>
-                              <a:ea typeface="Calibri" panose="020F0502020204030204" pitchFamily="34" charset="0"/>
-                              <a:cs typeface="Times New Roman" panose="02020603050405020304" pitchFamily="18" charset="0"/>
-                            </a:rPr>
-                            <a:t>0.377969</a:t>
-                          </a:r>
+                          <a:endParaRPr lang="ru-RU"/>
                         </a:p>
                       </a:txBody>
-                      <a:tcPr marL="68580" marR="68580" marT="0" marB="0" anchor="ctr"/>
+                      <a:tcPr marL="0" marR="0" marT="0" marB="0" anchor="ctr">
+                        <a:blipFill>
+                          <a:blip r:embed="rId2"/>
+                          <a:stretch>
+                            <a:fillRect l="-100222" t="-201481" r="-200887" b="-202222"/>
+                          </a:stretch>
+                        </a:blipFill>
+                      </a:tcPr>
                     </a:tc>
                     <a:tc>
                       <a:txBody>
                         <a:bodyPr/>
                         <a:lstStyle/>
                         <a:p>
-                          <a:pPr indent="450215" algn="ctr">
-                            <a:lnSpc>
-                              <a:spcPct val="150000"/>
-                            </a:lnSpc>
-                            <a:spcAft>
-                              <a:spcPts val="800"/>
-                            </a:spcAft>
-                          </a:pPr>
-                          <a:r>
-                            <a:rPr lang="ru-RU" sz="1400" dirty="0">
-                              <a:effectLst/>
-                              <a:latin typeface="Times New Roman" panose="02020603050405020304" pitchFamily="18" charset="0"/>
-                              <a:ea typeface="Calibri" panose="020F0502020204030204" pitchFamily="34" charset="0"/>
-                              <a:cs typeface="Times New Roman" panose="02020603050405020304" pitchFamily="18" charset="0"/>
-                            </a:rPr>
-                            <a:t>0.296663</a:t>
-                          </a:r>
+                          <a:endParaRPr lang="ru-RU"/>
                         </a:p>
                       </a:txBody>
-                      <a:tcPr marL="68580" marR="68580" marT="0" marB="0" anchor="ctr"/>
+                      <a:tcPr marL="0" marR="0" marT="0" marB="0" anchor="ctr">
+                        <a:blipFill>
+                          <a:blip r:embed="rId2"/>
+                          <a:stretch>
+                            <a:fillRect l="-200222" t="-201481" r="-100887" b="-202222"/>
+                          </a:stretch>
+                        </a:blipFill>
+                      </a:tcPr>
                     </a:tc>
                     <a:tc>
                       <a:txBody>
                         <a:bodyPr/>
                         <a:lstStyle/>
                         <a:p>
-                          <a:pPr indent="450215" algn="ctr">
-                            <a:lnSpc>
-                              <a:spcPct val="150000"/>
-                            </a:lnSpc>
-                            <a:spcAft>
-                              <a:spcPts val="800"/>
-                            </a:spcAft>
-                          </a:pPr>
-                          <a:r>
-                            <a:rPr lang="ru-RU" sz="1400">
-                              <a:effectLst/>
-                              <a:latin typeface="Times New Roman" panose="02020603050405020304" pitchFamily="18" charset="0"/>
-                              <a:ea typeface="Calibri" panose="020F0502020204030204" pitchFamily="34" charset="0"/>
-                              <a:cs typeface="Times New Roman" panose="02020603050405020304" pitchFamily="18" charset="0"/>
-                            </a:rPr>
-                            <a:t>1.087792</a:t>
-                          </a:r>
+                          <a:endParaRPr lang="ru-RU"/>
                         </a:p>
                       </a:txBody>
-                      <a:tcPr marL="68580" marR="68580" marT="0" marB="0" anchor="ctr"/>
+                      <a:tcPr marL="0" marR="0" marT="0" marB="0" anchor="ctr">
+                        <a:blipFill>
+                          <a:blip r:embed="rId2"/>
+                          <a:stretch>
+                            <a:fillRect l="-300222" t="-201481" r="-887" b="-202222"/>
+                          </a:stretch>
+                        </a:blipFill>
+                      </a:tcPr>
                     </a:tc>
                     <a:extLst>
                       <a:ext uri="{0D108BD9-81ED-4DB2-BD59-A6C34878D82A}">
@@ -7072,85 +7223,58 @@
                           </a:endParaRPr>
                         </a:p>
                       </a:txBody>
-                      <a:tcPr marL="68580" marR="68580" marT="0" marB="0" anchor="ctr"/>
+                      <a:tcPr marL="0" marR="0" marT="0" marB="0" anchor="ctr"/>
                     </a:tc>
                     <a:tc>
                       <a:txBody>
                         <a:bodyPr/>
                         <a:lstStyle/>
                         <a:p>
-                          <a:pPr indent="450215" algn="ctr">
-                            <a:lnSpc>
-                              <a:spcPct val="150000"/>
-                            </a:lnSpc>
-                            <a:spcAft>
-                              <a:spcPts val="800"/>
-                            </a:spcAft>
-                          </a:pPr>
-                          <a:r>
-                            <a:rPr lang="ru-RU" sz="1400" b="1" dirty="0">
-                              <a:effectLst/>
-                              <a:latin typeface="Times New Roman" panose="02020603050405020304" pitchFamily="18" charset="0"/>
-                              <a:ea typeface="Calibri" panose="020F0502020204030204" pitchFamily="34" charset="0"/>
-                              <a:cs typeface="Times New Roman" panose="02020603050405020304" pitchFamily="18" charset="0"/>
-                            </a:rPr>
-                            <a:t>0.377177</a:t>
-                          </a:r>
+                          <a:endParaRPr lang="ru-RU"/>
                         </a:p>
                       </a:txBody>
-                      <a:tcPr marL="68580" marR="68580" marT="0" marB="0" anchor="ctr"/>
+                      <a:tcPr marL="0" marR="0" marT="0" marB="0" anchor="ctr">
+                        <a:blipFill>
+                          <a:blip r:embed="rId2"/>
+                          <a:stretch>
+                            <a:fillRect l="-100222" t="-299265" r="-200887" b="-100735"/>
+                          </a:stretch>
+                        </a:blipFill>
+                      </a:tcPr>
                     </a:tc>
                     <a:tc>
                       <a:txBody>
                         <a:bodyPr/>
                         <a:lstStyle/>
                         <a:p>
-                          <a:pPr indent="450215" algn="ctr">
-                            <a:lnSpc>
-                              <a:spcPct val="150000"/>
-                            </a:lnSpc>
-                            <a:spcAft>
-                              <a:spcPts val="800"/>
-                            </a:spcAft>
-                          </a:pPr>
-                          <a:r>
-                            <a:rPr lang="ru-RU" sz="1400" b="1" dirty="0">
-                              <a:effectLst/>
-                              <a:latin typeface="Times New Roman" panose="02020603050405020304" pitchFamily="18" charset="0"/>
-                              <a:ea typeface="Calibri" panose="020F0502020204030204" pitchFamily="34" charset="0"/>
-                              <a:cs typeface="Times New Roman" panose="02020603050405020304" pitchFamily="18" charset="0"/>
-                            </a:rPr>
-                            <a:t>0.296323</a:t>
-                          </a:r>
+                          <a:endParaRPr lang="ru-RU"/>
                         </a:p>
                       </a:txBody>
-                      <a:tcPr marL="68580" marR="68580" marT="0" marB="0" anchor="ctr"/>
+                      <a:tcPr marL="0" marR="0" marT="0" marB="0" anchor="ctr">
+                        <a:blipFill>
+                          <a:blip r:embed="rId2"/>
+                          <a:stretch>
+                            <a:fillRect l="-200222" t="-299265" r="-100887" b="-100735"/>
+                          </a:stretch>
+                        </a:blipFill>
+                      </a:tcPr>
                     </a:tc>
                     <a:tc>
                       <a:txBody>
                         <a:bodyPr/>
                         <a:lstStyle/>
                         <a:p>
-                          <a:pPr indent="450215" algn="ctr">
-                            <a:lnSpc>
-                              <a:spcPct val="150000"/>
-                            </a:lnSpc>
-                            <a:spcAft>
-                              <a:spcPts val="800"/>
-                            </a:spcAft>
-                          </a:pPr>
-                          <a:r>
-                            <a:rPr lang="ru-RU" sz="1400" dirty="0">
-                              <a:effectLst/>
-                              <a:latin typeface="Times New Roman" panose="02020603050405020304" pitchFamily="18" charset="0"/>
-                              <a:ea typeface="Calibri" panose="020F0502020204030204" pitchFamily="34" charset="0"/>
-                              <a:cs typeface="Times New Roman" panose="02020603050405020304" pitchFamily="18" charset="0"/>
-                            </a:rPr>
-                            <a:t>1.088225</a:t>
-                          </a:r>
+                          <a:endParaRPr lang="ru-RU"/>
                         </a:p>
                       </a:txBody>
-                      <a:tcPr marL="68580" marR="68580" marT="0" marB="0" anchor="ctr"/>
+                      <a:tcPr marL="0" marR="0" marT="0" marB="0" anchor="ctr">
+                        <a:blipFill>
+                          <a:blip r:embed="rId2"/>
+                          <a:stretch>
+                            <a:fillRect l="-300222" t="-299265" r="-887" b="-100735"/>
+                          </a:stretch>
+                        </a:blipFill>
+                      </a:tcPr>
                     </a:tc>
                     <a:extLst>
                       <a:ext uri="{0D108BD9-81ED-4DB2-BD59-A6C34878D82A}">
@@ -7183,85 +7307,58 @@
                           </a:r>
                         </a:p>
                       </a:txBody>
-                      <a:tcPr marL="68580" marR="68580" marT="0" marB="0" anchor="ctr"/>
+                      <a:tcPr marL="0" marR="0" marT="0" marB="0" anchor="ctr"/>
                     </a:tc>
                     <a:tc>
                       <a:txBody>
                         <a:bodyPr/>
                         <a:lstStyle/>
                         <a:p>
-                          <a:pPr indent="450215" algn="ctr">
-                            <a:lnSpc>
-                              <a:spcPct val="150000"/>
-                            </a:lnSpc>
-                            <a:spcAft>
-                              <a:spcPts val="800"/>
-                            </a:spcAft>
-                          </a:pPr>
-                          <a:r>
-                            <a:rPr lang="ru-RU" sz="1400">
-                              <a:effectLst/>
-                              <a:latin typeface="Times New Roman" panose="02020603050405020304" pitchFamily="18" charset="0"/>
-                              <a:ea typeface="Calibri" panose="020F0502020204030204" pitchFamily="34" charset="0"/>
-                              <a:cs typeface="Times New Roman" panose="02020603050405020304" pitchFamily="18" charset="0"/>
-                            </a:rPr>
-                            <a:t>0.391797</a:t>
-                          </a:r>
+                          <a:endParaRPr lang="ru-RU"/>
                         </a:p>
                       </a:txBody>
-                      <a:tcPr marL="68580" marR="68580" marT="0" marB="0" anchor="ctr"/>
+                      <a:tcPr marL="0" marR="0" marT="0" marB="0" anchor="ctr">
+                        <a:blipFill>
+                          <a:blip r:embed="rId2"/>
+                          <a:stretch>
+                            <a:fillRect l="-100222" t="-402222" r="-200887" b="-1481"/>
+                          </a:stretch>
+                        </a:blipFill>
+                      </a:tcPr>
                     </a:tc>
                     <a:tc>
                       <a:txBody>
                         <a:bodyPr/>
                         <a:lstStyle/>
                         <a:p>
-                          <a:pPr indent="450215" algn="ctr">
-                            <a:lnSpc>
-                              <a:spcPct val="150000"/>
-                            </a:lnSpc>
-                            <a:spcAft>
-                              <a:spcPts val="800"/>
-                            </a:spcAft>
-                          </a:pPr>
-                          <a:r>
-                            <a:rPr lang="ru-RU" sz="1400">
-                              <a:effectLst/>
-                              <a:latin typeface="Times New Roman" panose="02020603050405020304" pitchFamily="18" charset="0"/>
-                              <a:ea typeface="Calibri" panose="020F0502020204030204" pitchFamily="34" charset="0"/>
-                              <a:cs typeface="Times New Roman" panose="02020603050405020304" pitchFamily="18" charset="0"/>
-                            </a:rPr>
-                            <a:t>0.304396</a:t>
-                          </a:r>
+                          <a:endParaRPr lang="ru-RU"/>
                         </a:p>
                       </a:txBody>
-                      <a:tcPr marL="68580" marR="68580" marT="0" marB="0" anchor="ctr"/>
+                      <a:tcPr marL="0" marR="0" marT="0" marB="0" anchor="ctr">
+                        <a:blipFill>
+                          <a:blip r:embed="rId2"/>
+                          <a:stretch>
+                            <a:fillRect l="-200222" t="-402222" r="-100887" b="-1481"/>
+                          </a:stretch>
+                        </a:blipFill>
+                      </a:tcPr>
                     </a:tc>
                     <a:tc>
                       <a:txBody>
                         <a:bodyPr/>
                         <a:lstStyle/>
                         <a:p>
-                          <a:pPr indent="450215" algn="ctr">
-                            <a:lnSpc>
-                              <a:spcPct val="150000"/>
-                            </a:lnSpc>
-                            <a:spcAft>
-                              <a:spcPts val="800"/>
-                            </a:spcAft>
-                          </a:pPr>
-                          <a:r>
-                            <a:rPr lang="ru-RU" sz="1400" dirty="0">
-                              <a:effectLst/>
-                              <a:latin typeface="Times New Roman" panose="02020603050405020304" pitchFamily="18" charset="0"/>
-                              <a:ea typeface="Calibri" panose="020F0502020204030204" pitchFamily="34" charset="0"/>
-                              <a:cs typeface="Times New Roman" panose="02020603050405020304" pitchFamily="18" charset="0"/>
-                            </a:rPr>
-                            <a:t>1.079564</a:t>
-                          </a:r>
+                          <a:endParaRPr lang="ru-RU"/>
                         </a:p>
                       </a:txBody>
-                      <a:tcPr marL="68580" marR="68580" marT="0" marB="0" anchor="ctr"/>
+                      <a:tcPr marL="0" marR="0" marT="0" marB="0" anchor="ctr">
+                        <a:blipFill>
+                          <a:blip r:embed="rId2"/>
+                          <a:stretch>
+                            <a:fillRect l="-300222" t="-402222" r="-887" b="-1481"/>
+                          </a:stretch>
+                        </a:blipFill>
+                      </a:tcPr>
                     </a:tc>
                     <a:extLst>
                       <a:ext uri="{0D108BD9-81ED-4DB2-BD59-A6C34878D82A}">
@@ -7616,7 +7713,7 @@
               </a:bodyPr>
               <a:lstStyle/>
               <a:p>
-                <a:pPr>
+                <a:pPr algn="just">
                   <a:lnSpc>
                     <a:spcPct val="250000"/>
                   </a:lnSpc>
@@ -7630,7 +7727,7 @@
                 </a:r>
               </a:p>
               <a:p>
-                <a:pPr marL="285750" indent="-285750">
+                <a:pPr marL="285750" indent="-285750" algn="just">
                   <a:lnSpc>
                     <a:spcPct val="250000"/>
                   </a:lnSpc>
@@ -7674,7 +7771,7 @@
                 </a:r>
               </a:p>
               <a:p>
-                <a:pPr marL="285750" indent="-285750">
+                <a:pPr marL="285750" indent="-285750" algn="just">
                   <a:lnSpc>
                     <a:spcPct val="250000"/>
                   </a:lnSpc>
@@ -7742,7 +7839,7 @@
                     <a:latin typeface="Times New Roman" panose="02020603050405020304" pitchFamily="18" charset="0"/>
                     <a:cs typeface="Times New Roman" panose="02020603050405020304" pitchFamily="18" charset="0"/>
                   </a:rPr>
-                  <a:t>в подавляющем большинстве конфигураций</a:t>
+                  <a:t>в большинстве конфигураций</a:t>
                 </a:r>
                 <a:r>
                   <a:rPr lang="en-US" dirty="0">
@@ -7753,7 +7850,7 @@
                 </a:r>
               </a:p>
               <a:p>
-                <a:pPr marL="285750" indent="-285750">
+                <a:pPr marL="285750" indent="-285750" algn="just">
                   <a:lnSpc>
                     <a:spcPct val="250000"/>
                   </a:lnSpc>
@@ -7769,11 +7866,11 @@
                     <a:latin typeface="Times New Roman" panose="02020603050405020304" pitchFamily="18" charset="0"/>
                     <a:cs typeface="Times New Roman" panose="02020603050405020304" pitchFamily="18" charset="0"/>
                   </a:rPr>
-                  <a:t>На реальных данных метод конкурентоспособен, уступая лишь на 3–4% в задачах с большой выборкой;</a:t>
+                  <a:t>На реальных данных метод конкурентоспособен, уступая на 3–4% ядерным методам по выбранным метрикам;</a:t>
                 </a:r>
               </a:p>
               <a:p>
-                <a:pPr marL="285750" indent="-285750">
+                <a:pPr marL="285750" indent="-285750" algn="just">
                   <a:lnSpc>
                     <a:spcPct val="250000"/>
                   </a:lnSpc>
@@ -7944,7 +8041,7 @@
               <a:blipFill>
                 <a:blip r:embed="rId2"/>
                 <a:stretch>
-                  <a:fillRect l="-481" b="-621"/>
+                  <a:fillRect l="-481" r="-481" b="-621"/>
                 </a:stretch>
               </a:blipFill>
             </p:spPr>
@@ -8052,7 +8149,7 @@
         <p:spPr>
           <a:xfrm>
             <a:off x="387790" y="523220"/>
-            <a:ext cx="11416420" cy="3441135"/>
+            <a:ext cx="11416420" cy="3435812"/>
           </a:xfrm>
           <a:prstGeom prst="rect">
             <a:avLst/>
@@ -8117,7 +8214,15 @@
                 <a:latin typeface="Times New Roman" panose="02020603050405020304" pitchFamily="18" charset="0"/>
                 <a:cs typeface="Times New Roman" panose="02020603050405020304" pitchFamily="18" charset="0"/>
               </a:rPr>
-              <a:t>, сочетающего устойчивость энтропийного метода и гибкость ядерного сглаживания</a:t>
+              <a:t>, </a:t>
+            </a:r>
+            <a:r>
+              <a:rPr lang="ru-RU" sz="1800" dirty="0">
+                <a:effectLst/>
+                <a:latin typeface="Times New Roman" panose="02020603050405020304" pitchFamily="18" charset="0"/>
+                <a:ea typeface="Calibri" panose="020F0502020204030204" pitchFamily="34" charset="0"/>
+              </a:rPr>
+              <a:t>объединяющего ядерный и энтропийный методы для сохранения устойчивости и гибкости аппроксимации</a:t>
             </a:r>
             <a:r>
               <a:rPr lang="en-US" dirty="0">
@@ -8136,76 +8241,22 @@
               <a:buChar char="•"/>
             </a:pPr>
             <a:r>
-              <a:rPr lang="ru-RU" dirty="0">
-                <a:latin typeface="Times New Roman" panose="02020603050405020304" pitchFamily="18" charset="0"/>
-                <a:cs typeface="Times New Roman" panose="02020603050405020304" pitchFamily="18" charset="0"/>
-              </a:rPr>
-              <a:t>Оптимизация вычислительной сложности для работы с многомерными данными</a:t>
-            </a:r>
-            <a:r>
-              <a:rPr lang="en-US" dirty="0">
-                <a:latin typeface="Times New Roman" panose="02020603050405020304" pitchFamily="18" charset="0"/>
-                <a:cs typeface="Times New Roman" panose="02020603050405020304" pitchFamily="18" charset="0"/>
-              </a:rPr>
-              <a:t>;</a:t>
-            </a:r>
-          </a:p>
-          <a:p>
-            <a:pPr marL="285750" indent="-285750">
-              <a:lnSpc>
-                <a:spcPct val="250000"/>
-              </a:lnSpc>
-              <a:buFont typeface="Arial" panose="020B0604020202020204" pitchFamily="34" charset="0"/>
-              <a:buChar char="•"/>
-            </a:pPr>
-            <a:r>
-              <a:rPr lang="ru-RU" b="0" i="0" dirty="0">
-                <a:solidFill>
-                  <a:srgbClr val="1D1D1F"/>
-                </a:solidFill>
+              <a:rPr lang="ru-RU" sz="1800" dirty="0">
                 <a:effectLst/>
                 <a:latin typeface="Times New Roman" panose="02020603050405020304" pitchFamily="18" charset="0"/>
-                <a:cs typeface="Times New Roman" panose="02020603050405020304" pitchFamily="18" charset="0"/>
+                <a:ea typeface="Calibri" panose="020F0502020204030204" pitchFamily="34" charset="0"/>
               </a:rPr>
-              <a:t>Расширение класса </a:t>
-            </a:r>
-            <a:r>
-              <a:rPr lang="ru-RU" b="0" i="0" dirty="0" err="1">
-                <a:solidFill>
-                  <a:srgbClr val="1D1D1F"/>
-                </a:solidFill>
-                <a:effectLst/>
-                <a:latin typeface="Times New Roman" panose="02020603050405020304" pitchFamily="18" charset="0"/>
-                <a:cs typeface="Times New Roman" panose="02020603050405020304" pitchFamily="18" charset="0"/>
-              </a:rPr>
-              <a:t>параметризаций</a:t>
-            </a:r>
-            <a:r>
-              <a:rPr lang="ru-RU" b="0" i="0" dirty="0">
-                <a:solidFill>
-                  <a:srgbClr val="1D1D1F"/>
-                </a:solidFill>
-                <a:effectLst/>
-                <a:latin typeface="Times New Roman" panose="02020603050405020304" pitchFamily="18" charset="0"/>
-                <a:cs typeface="Times New Roman" panose="02020603050405020304" pitchFamily="18" charset="0"/>
-              </a:rPr>
-              <a:t> (сплайны, базисные функции)</a:t>
+              <a:t>Развитие вычислительных методов для работы с данными большой размерности, связанных с семплированием по методу Монте-Карло</a:t>
             </a:r>
             <a:r>
               <a:rPr lang="ru-RU" dirty="0">
-                <a:solidFill>
-                  <a:srgbClr val="1D1D1F"/>
-                </a:solidFill>
                 <a:latin typeface="Times New Roman" panose="02020603050405020304" pitchFamily="18" charset="0"/>
+                <a:ea typeface="Calibri" panose="020F0502020204030204" pitchFamily="34" charset="0"/>
                 <a:cs typeface="Times New Roman" panose="02020603050405020304" pitchFamily="18" charset="0"/>
               </a:rPr>
               <a:t>.</a:t>
             </a:r>
-            <a:endParaRPr lang="ru-RU" b="0" i="0" dirty="0">
-              <a:solidFill>
-                <a:srgbClr val="1D1D1F"/>
-              </a:solidFill>
-              <a:effectLst/>
+            <a:endParaRPr lang="en-US" dirty="0">
               <a:latin typeface="Times New Roman" panose="02020603050405020304" pitchFamily="18" charset="0"/>
               <a:cs typeface="Times New Roman" panose="02020603050405020304" pitchFamily="18" charset="0"/>
             </a:endParaRPr>
@@ -8655,21 +8706,7 @@
                 <a:latin typeface="Times New Roman" panose="02020603050405020304" pitchFamily="18" charset="0"/>
                 <a:cs typeface="Times New Roman" panose="02020603050405020304" pitchFamily="18" charset="0"/>
               </a:rPr>
-              <a:t>Применение модифицированного энтропийного метода с «мягкой» рандомизацией </a:t>
-            </a:r>
-            <a:r>
-              <a:rPr lang="en-US" dirty="0">
-                <a:latin typeface="Times New Roman" panose="02020603050405020304" pitchFamily="18" charset="0"/>
-                <a:cs typeface="Times New Roman" panose="02020603050405020304" pitchFamily="18" charset="0"/>
-              </a:rPr>
-              <a:t>[1]</a:t>
-            </a:r>
-            <a:r>
-              <a:rPr lang="ru-RU" dirty="0">
-                <a:latin typeface="Times New Roman" panose="02020603050405020304" pitchFamily="18" charset="0"/>
-                <a:cs typeface="Times New Roman" panose="02020603050405020304" pitchFamily="18" charset="0"/>
-              </a:rPr>
-              <a:t> к оценке регрессии</a:t>
+              <a:t>Применение модифицированного энтропийного метода с «мягкой» рандомизацией к оценке регрессии</a:t>
             </a:r>
           </a:p>
           <a:p>
@@ -8694,696 +8731,6 @@
     <p:extLst>
       <p:ext uri="{BB962C8B-B14F-4D97-AF65-F5344CB8AC3E}">
         <p14:creationId xmlns:p14="http://schemas.microsoft.com/office/powerpoint/2010/main" val="2029585990"/>
-      </p:ext>
-    </p:extLst>
-  </p:cSld>
-  <p:clrMapOvr>
-    <a:masterClrMapping/>
-  </p:clrMapOvr>
-</p:sld>
-</file>
-
-<file path=ppt/slides/slide20.xml><?xml version="1.0" encoding="utf-8"?>
-<p:sld xmlns:a="http://schemas.openxmlformats.org/drawingml/2006/main" xmlns:r="http://schemas.openxmlformats.org/officeDocument/2006/relationships" xmlns:p="http://schemas.openxmlformats.org/presentationml/2006/main">
-  <p:cSld>
-    <p:spTree>
-      <p:nvGrpSpPr>
-        <p:cNvPr id="1" name="">
-          <a:extLst>
-            <a:ext uri="{FF2B5EF4-FFF2-40B4-BE49-F238E27FC236}">
-              <a16:creationId xmlns:a16="http://schemas.microsoft.com/office/drawing/2014/main" id="{6EE088B1-270F-467A-485B-FE41C3B705F8}"/>
-            </a:ext>
-          </a:extLst>
-        </p:cNvPr>
-        <p:cNvGrpSpPr/>
-        <p:nvPr/>
-      </p:nvGrpSpPr>
-      <p:grpSpPr>
-        <a:xfrm>
-          <a:off x="0" y="0"/>
-          <a:ext cx="0" cy="0"/>
-          <a:chOff x="0" y="0"/>
-          <a:chExt cx="0" cy="0"/>
-        </a:xfrm>
-      </p:grpSpPr>
-      <p:sp>
-        <p:nvSpPr>
-          <p:cNvPr id="2" name="TextBox 1">
-            <a:extLst>
-              <a:ext uri="{FF2B5EF4-FFF2-40B4-BE49-F238E27FC236}">
-                <a16:creationId xmlns:a16="http://schemas.microsoft.com/office/drawing/2014/main" id="{CA506851-A264-79D0-5147-2CE6E03FBAAF}"/>
-              </a:ext>
-            </a:extLst>
-          </p:cNvPr>
-          <p:cNvSpPr txBox="1"/>
-          <p:nvPr/>
-        </p:nvSpPr>
-        <p:spPr>
-          <a:xfrm>
-            <a:off x="4376426" y="0"/>
-            <a:ext cx="3439147" cy="523220"/>
-          </a:xfrm>
-          <a:prstGeom prst="rect">
-            <a:avLst/>
-          </a:prstGeom>
-          <a:noFill/>
-        </p:spPr>
-        <p:txBody>
-          <a:bodyPr wrap="none" rtlCol="0">
-            <a:spAutoFit/>
-          </a:bodyPr>
-          <a:lstStyle/>
-          <a:p>
-            <a:r>
-              <a:rPr lang="ru-RU" sz="2800" b="1" dirty="0">
-                <a:latin typeface="Times New Roman" panose="02020603050405020304" pitchFamily="18" charset="0"/>
-                <a:cs typeface="Times New Roman" panose="02020603050405020304" pitchFamily="18" charset="0"/>
-              </a:rPr>
-              <a:t>Список литературы</a:t>
-            </a:r>
-          </a:p>
-        </p:txBody>
-      </p:sp>
-      <p:sp>
-        <p:nvSpPr>
-          <p:cNvPr id="3" name="TextBox 2">
-            <a:extLst>
-              <a:ext uri="{FF2B5EF4-FFF2-40B4-BE49-F238E27FC236}">
-                <a16:creationId xmlns:a16="http://schemas.microsoft.com/office/drawing/2014/main" id="{6837EB01-75EB-F47F-3EB8-B95AA247CC82}"/>
-              </a:ext>
-            </a:extLst>
-          </p:cNvPr>
-          <p:cNvSpPr txBox="1"/>
-          <p:nvPr/>
-        </p:nvSpPr>
-        <p:spPr>
-          <a:xfrm>
-            <a:off x="387790" y="523220"/>
-            <a:ext cx="11416420" cy="5751831"/>
-          </a:xfrm>
-          <a:prstGeom prst="rect">
-            <a:avLst/>
-          </a:prstGeom>
-          <a:noFill/>
-        </p:spPr>
-        <p:txBody>
-          <a:bodyPr wrap="square" rtlCol="0">
-            <a:spAutoFit/>
-          </a:bodyPr>
-          <a:lstStyle/>
-          <a:p>
-            <a:pPr marL="342900" indent="-342900">
-              <a:lnSpc>
-                <a:spcPct val="150000"/>
-              </a:lnSpc>
-              <a:buFont typeface="+mj-lt"/>
-              <a:buAutoNum type="arabicPeriod"/>
-            </a:pPr>
-            <a:r>
-              <a:rPr lang="ru-RU" i="1" dirty="0">
-                <a:latin typeface="Times New Roman" panose="02020603050405020304" pitchFamily="18" charset="0"/>
-                <a:cs typeface="Times New Roman" panose="02020603050405020304" pitchFamily="18" charset="0"/>
-              </a:rPr>
-              <a:t>Дубнов Ю. А., Булычев А. В. </a:t>
-            </a:r>
-            <a:r>
-              <a:rPr lang="ru-RU" dirty="0">
-                <a:latin typeface="Times New Roman" panose="02020603050405020304" pitchFamily="18" charset="0"/>
-                <a:cs typeface="Times New Roman" panose="02020603050405020304" pitchFamily="18" charset="0"/>
-              </a:rPr>
-              <a:t>Приближенное оценивание с помощью ускоренного метода наибольшей энтропии. Часть 1. Постановка задачи и реализация для задачи регрессии // Информационные технологии и вычислительные системы. 2022. </a:t>
-            </a:r>
-            <a:r>
-              <a:rPr lang="en-US" dirty="0">
-                <a:latin typeface="Times New Roman" panose="02020603050405020304" pitchFamily="18" charset="0"/>
-                <a:cs typeface="Times New Roman" panose="02020603050405020304" pitchFamily="18" charset="0"/>
-              </a:rPr>
-              <a:t>№ 4. С. 69–80.</a:t>
-            </a:r>
-            <a:endParaRPr lang="ru-RU" dirty="0">
-              <a:latin typeface="Times New Roman" panose="02020603050405020304" pitchFamily="18" charset="0"/>
-              <a:cs typeface="Times New Roman" panose="02020603050405020304" pitchFamily="18" charset="0"/>
-            </a:endParaRPr>
-          </a:p>
-          <a:p>
-            <a:pPr marL="342900" lvl="0" indent="-342900" algn="just">
-              <a:lnSpc>
-                <a:spcPct val="150000"/>
-              </a:lnSpc>
-              <a:buFont typeface="+mj-lt"/>
-              <a:buAutoNum type="arabicPeriod"/>
-            </a:pPr>
-            <a:r>
-              <a:rPr lang="en-US" sz="1800" i="1" dirty="0">
-                <a:effectLst/>
-                <a:latin typeface="Times New Roman" panose="02020603050405020304" pitchFamily="18" charset="0"/>
-                <a:ea typeface="Calibri" panose="020F0502020204030204" pitchFamily="34" charset="0"/>
-                <a:cs typeface="Times New Roman" panose="02020603050405020304" pitchFamily="18" charset="0"/>
-              </a:rPr>
-              <a:t>Rosenblatt M.</a:t>
-            </a:r>
-            <a:r>
-              <a:rPr lang="en-US" sz="1800" dirty="0">
-                <a:effectLst/>
-                <a:latin typeface="Times New Roman" panose="02020603050405020304" pitchFamily="18" charset="0"/>
-                <a:ea typeface="Calibri" panose="020F0502020204030204" pitchFamily="34" charset="0"/>
-                <a:cs typeface="Times New Roman" panose="02020603050405020304" pitchFamily="18" charset="0"/>
-              </a:rPr>
-              <a:t> Remarks on Some Nonparametric Estimates of a Density Function // The Annals of Mathematical Statistics. — 1956. — Vol. 27, no. 3. — P. 832–837. — DOI: https://doi.org/10.1214/aoms/1177728190.</a:t>
-            </a:r>
-            <a:endParaRPr lang="ru-RU" sz="1800" dirty="0">
-              <a:effectLst/>
-              <a:latin typeface="Times New Roman" panose="02020603050405020304" pitchFamily="18" charset="0"/>
-              <a:ea typeface="Calibri" panose="020F0502020204030204" pitchFamily="34" charset="0"/>
-              <a:cs typeface="Times New Roman" panose="02020603050405020304" pitchFamily="18" charset="0"/>
-            </a:endParaRPr>
-          </a:p>
-          <a:p>
-            <a:pPr marL="342900" lvl="0" indent="-342900" algn="just">
-              <a:lnSpc>
-                <a:spcPct val="150000"/>
-              </a:lnSpc>
-              <a:spcAft>
-                <a:spcPts val="800"/>
-              </a:spcAft>
-              <a:buFont typeface="+mj-lt"/>
-              <a:buAutoNum type="arabicPeriod"/>
-            </a:pPr>
-            <a:r>
-              <a:rPr lang="en-US" sz="1800" i="1" dirty="0" err="1">
-                <a:effectLst/>
-                <a:latin typeface="Times New Roman" panose="02020603050405020304" pitchFamily="18" charset="0"/>
-                <a:ea typeface="Calibri" panose="020F0502020204030204" pitchFamily="34" charset="0"/>
-                <a:cs typeface="Times New Roman" panose="02020603050405020304" pitchFamily="18" charset="0"/>
-              </a:rPr>
-              <a:t>Parzen</a:t>
-            </a:r>
-            <a:r>
-              <a:rPr lang="en-US" sz="1800" i="1" dirty="0">
-                <a:effectLst/>
-                <a:latin typeface="Times New Roman" panose="02020603050405020304" pitchFamily="18" charset="0"/>
-                <a:ea typeface="Calibri" panose="020F0502020204030204" pitchFamily="34" charset="0"/>
-                <a:cs typeface="Times New Roman" panose="02020603050405020304" pitchFamily="18" charset="0"/>
-              </a:rPr>
-              <a:t> E.</a:t>
-            </a:r>
-            <a:r>
-              <a:rPr lang="en-US" sz="1800" dirty="0">
-                <a:effectLst/>
-                <a:latin typeface="Times New Roman" panose="02020603050405020304" pitchFamily="18" charset="0"/>
-                <a:ea typeface="Calibri" panose="020F0502020204030204" pitchFamily="34" charset="0"/>
-                <a:cs typeface="Times New Roman" panose="02020603050405020304" pitchFamily="18" charset="0"/>
-              </a:rPr>
-              <a:t> On Estimation of a Probability Density Function and Mode // The Annals of Mathematical Statistics. — 1962. — Vol. 33, no. 3. — P. 1065–1076. — DOI: </a:t>
-            </a:r>
-            <a:r>
-              <a:rPr lang="en-US" sz="1800" dirty="0">
-                <a:effectLst/>
-                <a:latin typeface="Times New Roman" panose="02020603050405020304" pitchFamily="18" charset="0"/>
-                <a:ea typeface="Calibri" panose="020F0502020204030204" pitchFamily="34" charset="0"/>
-                <a:cs typeface="Times New Roman" panose="02020603050405020304" pitchFamily="18" charset="0"/>
-                <a:hlinkClick r:id="rId2"/>
-              </a:rPr>
-              <a:t>https://doi.org/10.1214/aoms/1177704472</a:t>
-            </a:r>
-            <a:r>
-              <a:rPr lang="en-US" sz="1800" dirty="0">
-                <a:effectLst/>
-                <a:latin typeface="Times New Roman" panose="02020603050405020304" pitchFamily="18" charset="0"/>
-                <a:ea typeface="Calibri" panose="020F0502020204030204" pitchFamily="34" charset="0"/>
-                <a:cs typeface="Times New Roman" panose="02020603050405020304" pitchFamily="18" charset="0"/>
-              </a:rPr>
-              <a:t>.</a:t>
-            </a:r>
-            <a:endParaRPr lang="ru-RU" sz="1800" dirty="0">
-              <a:effectLst/>
-              <a:latin typeface="Times New Roman" panose="02020603050405020304" pitchFamily="18" charset="0"/>
-              <a:ea typeface="Calibri" panose="020F0502020204030204" pitchFamily="34" charset="0"/>
-              <a:cs typeface="Times New Roman" panose="02020603050405020304" pitchFamily="18" charset="0"/>
-            </a:endParaRPr>
-          </a:p>
-          <a:p>
-            <a:pPr marL="342900" lvl="0" indent="-342900" algn="just">
-              <a:lnSpc>
-                <a:spcPct val="150000"/>
-              </a:lnSpc>
-              <a:spcAft>
-                <a:spcPts val="800"/>
-              </a:spcAft>
-              <a:buFont typeface="+mj-lt"/>
-              <a:buAutoNum type="arabicPeriod"/>
-            </a:pPr>
-            <a:r>
-              <a:rPr lang="en-US" sz="1800" i="1" dirty="0" err="1">
-                <a:effectLst/>
-                <a:latin typeface="Times New Roman" panose="02020603050405020304" pitchFamily="18" charset="0"/>
-                <a:ea typeface="Calibri" panose="020F0502020204030204" pitchFamily="34" charset="0"/>
-                <a:cs typeface="Times New Roman" panose="02020603050405020304" pitchFamily="18" charset="0"/>
-              </a:rPr>
-              <a:t>Nadaraya</a:t>
-            </a:r>
-            <a:r>
-              <a:rPr lang="en-US" sz="1800" i="1" dirty="0">
-                <a:effectLst/>
-                <a:latin typeface="Times New Roman" panose="02020603050405020304" pitchFamily="18" charset="0"/>
-                <a:ea typeface="Calibri" panose="020F0502020204030204" pitchFamily="34" charset="0"/>
-                <a:cs typeface="Times New Roman" panose="02020603050405020304" pitchFamily="18" charset="0"/>
-              </a:rPr>
-              <a:t> E. A. </a:t>
-            </a:r>
-            <a:r>
-              <a:rPr lang="en-US" sz="1800" dirty="0">
-                <a:effectLst/>
-                <a:latin typeface="Times New Roman" panose="02020603050405020304" pitchFamily="18" charset="0"/>
-                <a:ea typeface="Calibri" panose="020F0502020204030204" pitchFamily="34" charset="0"/>
-                <a:cs typeface="Times New Roman" panose="02020603050405020304" pitchFamily="18" charset="0"/>
-              </a:rPr>
-              <a:t>On Estimating Regression // Theory of Probability and Its Applications. — 1964. — Vol. 9, no. 1. — P. 141–142. — DOI: </a:t>
-            </a:r>
-            <a:r>
-              <a:rPr lang="en-US" sz="1800" dirty="0">
-                <a:effectLst/>
-                <a:latin typeface="Times New Roman" panose="02020603050405020304" pitchFamily="18" charset="0"/>
-                <a:ea typeface="Calibri" panose="020F0502020204030204" pitchFamily="34" charset="0"/>
-                <a:cs typeface="Times New Roman" panose="02020603050405020304" pitchFamily="18" charset="0"/>
-                <a:hlinkClick r:id="rId3"/>
-              </a:rPr>
-              <a:t>https://doi.org/10.1137/1109020</a:t>
-            </a:r>
-            <a:r>
-              <a:rPr lang="en-US" sz="1800" dirty="0">
-                <a:effectLst/>
-                <a:latin typeface="Times New Roman" panose="02020603050405020304" pitchFamily="18" charset="0"/>
-                <a:ea typeface="Calibri" panose="020F0502020204030204" pitchFamily="34" charset="0"/>
-                <a:cs typeface="Times New Roman" panose="02020603050405020304" pitchFamily="18" charset="0"/>
-              </a:rPr>
-              <a:t>.</a:t>
-            </a:r>
-            <a:endParaRPr lang="ru-RU" dirty="0">
-              <a:latin typeface="Times New Roman" panose="02020603050405020304" pitchFamily="18" charset="0"/>
-              <a:ea typeface="Calibri" panose="020F0502020204030204" pitchFamily="34" charset="0"/>
-              <a:cs typeface="Times New Roman" panose="02020603050405020304" pitchFamily="18" charset="0"/>
-            </a:endParaRPr>
-          </a:p>
-          <a:p>
-            <a:pPr marL="342900" lvl="0" indent="-342900" algn="just">
-              <a:lnSpc>
-                <a:spcPct val="150000"/>
-              </a:lnSpc>
-              <a:spcAft>
-                <a:spcPts val="800"/>
-              </a:spcAft>
-              <a:buFont typeface="+mj-lt"/>
-              <a:buAutoNum type="arabicPeriod"/>
-            </a:pPr>
-            <a:r>
-              <a:rPr lang="en-US" sz="1800" i="1" dirty="0">
-                <a:effectLst/>
-                <a:latin typeface="Times New Roman" panose="02020603050405020304" pitchFamily="18" charset="0"/>
-                <a:ea typeface="Calibri" panose="020F0502020204030204" pitchFamily="34" charset="0"/>
-              </a:rPr>
-              <a:t>Watson G. S. </a:t>
-            </a:r>
-            <a:r>
-              <a:rPr lang="en-US" sz="1800" dirty="0">
-                <a:effectLst/>
-                <a:latin typeface="Times New Roman" panose="02020603050405020304" pitchFamily="18" charset="0"/>
-                <a:ea typeface="Calibri" panose="020F0502020204030204" pitchFamily="34" charset="0"/>
-              </a:rPr>
-              <a:t>Smooth regression analysis // </a:t>
-            </a:r>
-            <a:r>
-              <a:rPr lang="en-US" sz="1800" dirty="0" err="1">
-                <a:effectLst/>
-                <a:latin typeface="Times New Roman" panose="02020603050405020304" pitchFamily="18" charset="0"/>
-                <a:ea typeface="Calibri" panose="020F0502020204030204" pitchFamily="34" charset="0"/>
-              </a:rPr>
-              <a:t>Sankhyā</a:t>
-            </a:r>
-            <a:r>
-              <a:rPr lang="en-US" sz="1800" dirty="0">
-                <a:effectLst/>
-                <a:latin typeface="Times New Roman" panose="02020603050405020304" pitchFamily="18" charset="0"/>
-                <a:ea typeface="Calibri" panose="020F0502020204030204" pitchFamily="34" charset="0"/>
-              </a:rPr>
-              <a:t>: The Indian Journal of Statistics, Series A. — 1964. — Vol. 26, no. 4. — P. 359–372. — JSTOR: 25049340.</a:t>
-            </a:r>
-          </a:p>
-          <a:p>
-            <a:pPr marL="342900" lvl="0" indent="-342900" algn="just">
-              <a:lnSpc>
-                <a:spcPct val="150000"/>
-              </a:lnSpc>
-              <a:spcAft>
-                <a:spcPts val="800"/>
-              </a:spcAft>
-              <a:buFont typeface="+mj-lt"/>
-              <a:buAutoNum type="arabicPeriod"/>
-            </a:pPr>
-            <a:r>
-              <a:rPr lang="en-US" sz="1800" i="1" dirty="0">
-                <a:effectLst/>
-                <a:latin typeface="Times New Roman" panose="02020603050405020304" pitchFamily="18" charset="0"/>
-                <a:ea typeface="Calibri" panose="020F0502020204030204" pitchFamily="34" charset="0"/>
-              </a:rPr>
-              <a:t>Silverman B. W. </a:t>
-            </a:r>
-            <a:r>
-              <a:rPr lang="en-US" sz="1800" dirty="0">
-                <a:effectLst/>
-                <a:latin typeface="Times New Roman" panose="02020603050405020304" pitchFamily="18" charset="0"/>
-                <a:ea typeface="Calibri" panose="020F0502020204030204" pitchFamily="34" charset="0"/>
-              </a:rPr>
-              <a:t>Density Estimation for Statistics and Data Analysis [Text] / B. W. Silverman. — London : Chapman &amp; Hall/CRC, 1986. — 334 p. — ISBN 978-0-412-24620-3.</a:t>
-            </a:r>
-            <a:endParaRPr lang="en-US" sz="1800" dirty="0">
-              <a:effectLst/>
-              <a:latin typeface="Times New Roman" panose="02020603050405020304" pitchFamily="18" charset="0"/>
-              <a:ea typeface="Calibri" panose="020F0502020204030204" pitchFamily="34" charset="0"/>
-              <a:cs typeface="Times New Roman" panose="02020603050405020304" pitchFamily="18" charset="0"/>
-            </a:endParaRPr>
-          </a:p>
-        </p:txBody>
-      </p:sp>
-    </p:spTree>
-    <p:extLst>
-      <p:ext uri="{BB962C8B-B14F-4D97-AF65-F5344CB8AC3E}">
-        <p14:creationId xmlns:p14="http://schemas.microsoft.com/office/powerpoint/2010/main" val="611517564"/>
-      </p:ext>
-    </p:extLst>
-  </p:cSld>
-  <p:clrMapOvr>
-    <a:masterClrMapping/>
-  </p:clrMapOvr>
-</p:sld>
-</file>
-
-<file path=ppt/slides/slide21.xml><?xml version="1.0" encoding="utf-8"?>
-<p:sld xmlns:a="http://schemas.openxmlformats.org/drawingml/2006/main" xmlns:r="http://schemas.openxmlformats.org/officeDocument/2006/relationships" xmlns:p="http://schemas.openxmlformats.org/presentationml/2006/main">
-  <p:cSld>
-    <p:spTree>
-      <p:nvGrpSpPr>
-        <p:cNvPr id="1" name="">
-          <a:extLst>
-            <a:ext uri="{FF2B5EF4-FFF2-40B4-BE49-F238E27FC236}">
-              <a16:creationId xmlns:a16="http://schemas.microsoft.com/office/drawing/2014/main" id="{6EE088B1-270F-467A-485B-FE41C3B705F8}"/>
-            </a:ext>
-          </a:extLst>
-        </p:cNvPr>
-        <p:cNvGrpSpPr/>
-        <p:nvPr/>
-      </p:nvGrpSpPr>
-      <p:grpSpPr>
-        <a:xfrm>
-          <a:off x="0" y="0"/>
-          <a:ext cx="0" cy="0"/>
-          <a:chOff x="0" y="0"/>
-          <a:chExt cx="0" cy="0"/>
-        </a:xfrm>
-      </p:grpSpPr>
-      <p:sp>
-        <p:nvSpPr>
-          <p:cNvPr id="2" name="TextBox 1">
-            <a:extLst>
-              <a:ext uri="{FF2B5EF4-FFF2-40B4-BE49-F238E27FC236}">
-                <a16:creationId xmlns:a16="http://schemas.microsoft.com/office/drawing/2014/main" id="{CA506851-A264-79D0-5147-2CE6E03FBAAF}"/>
-              </a:ext>
-            </a:extLst>
-          </p:cNvPr>
-          <p:cNvSpPr txBox="1"/>
-          <p:nvPr/>
-        </p:nvSpPr>
-        <p:spPr>
-          <a:xfrm>
-            <a:off x="4376426" y="0"/>
-            <a:ext cx="3439147" cy="523220"/>
-          </a:xfrm>
-          <a:prstGeom prst="rect">
-            <a:avLst/>
-          </a:prstGeom>
-          <a:noFill/>
-        </p:spPr>
-        <p:txBody>
-          <a:bodyPr wrap="none" rtlCol="0">
-            <a:spAutoFit/>
-          </a:bodyPr>
-          <a:lstStyle/>
-          <a:p>
-            <a:r>
-              <a:rPr lang="ru-RU" sz="2800" b="1" dirty="0">
-                <a:latin typeface="Times New Roman" panose="02020603050405020304" pitchFamily="18" charset="0"/>
-                <a:cs typeface="Times New Roman" panose="02020603050405020304" pitchFamily="18" charset="0"/>
-              </a:rPr>
-              <a:t>Список литературы</a:t>
-            </a:r>
-          </a:p>
-        </p:txBody>
-      </p:sp>
-      <p:sp>
-        <p:nvSpPr>
-          <p:cNvPr id="3" name="TextBox 2">
-            <a:extLst>
-              <a:ext uri="{FF2B5EF4-FFF2-40B4-BE49-F238E27FC236}">
-                <a16:creationId xmlns:a16="http://schemas.microsoft.com/office/drawing/2014/main" id="{6837EB01-75EB-F47F-3EB8-B95AA247CC82}"/>
-              </a:ext>
-            </a:extLst>
-          </p:cNvPr>
-          <p:cNvSpPr txBox="1"/>
-          <p:nvPr/>
-        </p:nvSpPr>
-        <p:spPr>
-          <a:xfrm>
-            <a:off x="387790" y="523220"/>
-            <a:ext cx="11416420" cy="4197559"/>
-          </a:xfrm>
-          <a:prstGeom prst="rect">
-            <a:avLst/>
-          </a:prstGeom>
-          <a:noFill/>
-        </p:spPr>
-        <p:txBody>
-          <a:bodyPr wrap="square" rtlCol="0">
-            <a:spAutoFit/>
-          </a:bodyPr>
-          <a:lstStyle/>
-          <a:p>
-            <a:pPr marL="342900" indent="-342900">
-              <a:lnSpc>
-                <a:spcPct val="150000"/>
-              </a:lnSpc>
-              <a:buFont typeface="+mj-lt"/>
-              <a:buAutoNum type="arabicPeriod" startAt="7"/>
-            </a:pPr>
-            <a:r>
-              <a:rPr lang="en-US" sz="1800" i="1" dirty="0">
-                <a:effectLst/>
-                <a:latin typeface="Times New Roman" panose="02020603050405020304" pitchFamily="18" charset="0"/>
-                <a:ea typeface="Calibri" panose="020F0502020204030204" pitchFamily="34" charset="0"/>
-              </a:rPr>
-              <a:t>McLachlan G., Do K.-A., </a:t>
-            </a:r>
-            <a:r>
-              <a:rPr lang="en-US" sz="1800" i="1" dirty="0" err="1">
-                <a:effectLst/>
-                <a:latin typeface="Times New Roman" panose="02020603050405020304" pitchFamily="18" charset="0"/>
-                <a:ea typeface="Calibri" panose="020F0502020204030204" pitchFamily="34" charset="0"/>
-              </a:rPr>
-              <a:t>Ambroise</a:t>
-            </a:r>
-            <a:r>
-              <a:rPr lang="en-US" sz="1800" i="1" dirty="0">
-                <a:effectLst/>
-                <a:latin typeface="Times New Roman" panose="02020603050405020304" pitchFamily="18" charset="0"/>
-                <a:ea typeface="Calibri" panose="020F0502020204030204" pitchFamily="34" charset="0"/>
-              </a:rPr>
-              <a:t> C. </a:t>
-            </a:r>
-            <a:r>
-              <a:rPr lang="en-US" sz="1800" dirty="0">
-                <a:effectLst/>
-                <a:latin typeface="Times New Roman" panose="02020603050405020304" pitchFamily="18" charset="0"/>
-                <a:ea typeface="Calibri" panose="020F0502020204030204" pitchFamily="34" charset="0"/>
-              </a:rPr>
-              <a:t>Analyzing Microarray Gene Expression Data [Text] / G. McLachlan, K.-A. Do, C. </a:t>
-            </a:r>
-            <a:r>
-              <a:rPr lang="en-US" sz="1800" dirty="0" err="1">
-                <a:effectLst/>
-                <a:latin typeface="Times New Roman" panose="02020603050405020304" pitchFamily="18" charset="0"/>
-                <a:ea typeface="Calibri" panose="020F0502020204030204" pitchFamily="34" charset="0"/>
-              </a:rPr>
-              <a:t>Ambroise</a:t>
-            </a:r>
-            <a:r>
-              <a:rPr lang="en-US" sz="1800" dirty="0">
-                <a:effectLst/>
-                <a:latin typeface="Times New Roman" panose="02020603050405020304" pitchFamily="18" charset="0"/>
-                <a:ea typeface="Calibri" panose="020F0502020204030204" pitchFamily="34" charset="0"/>
-              </a:rPr>
-              <a:t>. — Hoboken, NJ : Wiley, 2004. — (Wiley Series in Probability and Statistics). — ISBN 978-0-471-22616-1. — DOI: </a:t>
-            </a:r>
-            <a:r>
-              <a:rPr lang="en-US" sz="1800" dirty="0">
-                <a:effectLst/>
-                <a:latin typeface="Times New Roman" panose="02020603050405020304" pitchFamily="18" charset="0"/>
-                <a:ea typeface="Calibri" panose="020F0502020204030204" pitchFamily="34" charset="0"/>
-                <a:hlinkClick r:id="rId2"/>
-              </a:rPr>
-              <a:t>https://doi.org/10.1002/047172842X</a:t>
-            </a:r>
-            <a:r>
-              <a:rPr lang="en-US" sz="1800" dirty="0">
-                <a:effectLst/>
-                <a:latin typeface="Times New Roman" panose="02020603050405020304" pitchFamily="18" charset="0"/>
-                <a:ea typeface="Calibri" panose="020F0502020204030204" pitchFamily="34" charset="0"/>
-              </a:rPr>
-              <a:t>.</a:t>
-            </a:r>
-          </a:p>
-          <a:p>
-            <a:pPr marL="342900" indent="-342900">
-              <a:lnSpc>
-                <a:spcPct val="150000"/>
-              </a:lnSpc>
-              <a:buFont typeface="+mj-lt"/>
-              <a:buAutoNum type="arabicPeriod" startAt="7"/>
-            </a:pPr>
-            <a:endParaRPr lang="en-US" i="1" dirty="0">
-              <a:latin typeface="Times New Roman" panose="02020603050405020304" pitchFamily="18" charset="0"/>
-              <a:cs typeface="Times New Roman" panose="02020603050405020304" pitchFamily="18" charset="0"/>
-            </a:endParaRPr>
-          </a:p>
-          <a:p>
-            <a:pPr marL="342900" indent="-342900">
-              <a:lnSpc>
-                <a:spcPct val="150000"/>
-              </a:lnSpc>
-              <a:buFont typeface="+mj-lt"/>
-              <a:buAutoNum type="arabicPeriod" startAt="7"/>
-            </a:pPr>
-            <a:r>
-              <a:rPr lang="en-US" i="1" dirty="0">
-                <a:latin typeface="Times New Roman" panose="02020603050405020304" pitchFamily="18" charset="0"/>
-                <a:cs typeface="Times New Roman" panose="02020603050405020304" pitchFamily="18" charset="0"/>
-              </a:rPr>
-              <a:t>Golan A., Judge G. G., Miller D. </a:t>
-            </a:r>
-            <a:r>
-              <a:rPr lang="en-US" dirty="0">
-                <a:latin typeface="Times New Roman" panose="02020603050405020304" pitchFamily="18" charset="0"/>
-                <a:cs typeface="Times New Roman" panose="02020603050405020304" pitchFamily="18" charset="0"/>
-              </a:rPr>
-              <a:t>Maximum Entropy Econometrics: Robust Estimation with Limited Data. — Chichester: John Wiley and Sons Ltd., 1996.</a:t>
-            </a:r>
-            <a:endParaRPr lang="ru-RU" dirty="0">
-              <a:latin typeface="Times New Roman" panose="02020603050405020304" pitchFamily="18" charset="0"/>
-              <a:cs typeface="Times New Roman" panose="02020603050405020304" pitchFamily="18" charset="0"/>
-            </a:endParaRPr>
-          </a:p>
-          <a:p>
-            <a:pPr marL="342900" indent="-342900">
-              <a:lnSpc>
-                <a:spcPct val="150000"/>
-              </a:lnSpc>
-              <a:buFont typeface="+mj-lt"/>
-              <a:buAutoNum type="arabicPeriod" startAt="7"/>
-            </a:pPr>
-            <a:r>
-              <a:rPr lang="ru-RU" i="1" dirty="0">
-                <a:latin typeface="Times New Roman" panose="02020603050405020304" pitchFamily="18" charset="0"/>
-                <a:cs typeface="Times New Roman" panose="02020603050405020304" pitchFamily="18" charset="0"/>
-              </a:rPr>
-              <a:t>Воеводин В. В., Кузнецов Ю. А. </a:t>
-            </a:r>
-            <a:r>
-              <a:rPr lang="ru-RU" dirty="0">
-                <a:latin typeface="Times New Roman" panose="02020603050405020304" pitchFamily="18" charset="0"/>
-                <a:cs typeface="Times New Roman" panose="02020603050405020304" pitchFamily="18" charset="0"/>
-              </a:rPr>
-              <a:t>Матрицы и вычисления. — М.: Наука, 1984.</a:t>
-            </a:r>
-          </a:p>
-          <a:p>
-            <a:pPr marL="342900" indent="-342900">
-              <a:lnSpc>
-                <a:spcPct val="150000"/>
-              </a:lnSpc>
-              <a:buFont typeface="+mj-lt"/>
-              <a:buAutoNum type="arabicPeriod" startAt="7"/>
-            </a:pPr>
-            <a:r>
-              <a:rPr lang="ru-RU" i="1" dirty="0">
-                <a:latin typeface="Times New Roman" panose="02020603050405020304" pitchFamily="18" charset="0"/>
-                <a:cs typeface="Times New Roman" panose="02020603050405020304" pitchFamily="18" charset="0"/>
-              </a:rPr>
-              <a:t>Цыпкин Я. З. </a:t>
-            </a:r>
-            <a:r>
-              <a:rPr lang="ru-RU" dirty="0">
-                <a:latin typeface="Times New Roman" panose="02020603050405020304" pitchFamily="18" charset="0"/>
-                <a:cs typeface="Times New Roman" panose="02020603050405020304" pitchFamily="18" charset="0"/>
-              </a:rPr>
-              <a:t>Основы теории обучающихся систем. — М.: Наука, 1970.</a:t>
-            </a:r>
-            <a:endParaRPr lang="en-US" dirty="0">
-              <a:latin typeface="Times New Roman" panose="02020603050405020304" pitchFamily="18" charset="0"/>
-              <a:cs typeface="Times New Roman" panose="02020603050405020304" pitchFamily="18" charset="0"/>
-            </a:endParaRPr>
-          </a:p>
-          <a:p>
-            <a:pPr marL="342900" indent="-342900">
-              <a:lnSpc>
-                <a:spcPct val="150000"/>
-              </a:lnSpc>
-              <a:buFont typeface="+mj-lt"/>
-              <a:buAutoNum type="arabicPeriod" startAt="7"/>
-            </a:pPr>
-            <a:r>
-              <a:rPr lang="en-US" i="1" dirty="0" err="1">
-                <a:latin typeface="Times New Roman" panose="02020603050405020304" pitchFamily="18" charset="0"/>
-                <a:cs typeface="Times New Roman" panose="02020603050405020304" pitchFamily="18" charset="0"/>
-              </a:rPr>
-              <a:t>Efron</a:t>
-            </a:r>
-            <a:r>
-              <a:rPr lang="en-US" i="1" dirty="0">
-                <a:latin typeface="Times New Roman" panose="02020603050405020304" pitchFamily="18" charset="0"/>
-                <a:cs typeface="Times New Roman" panose="02020603050405020304" pitchFamily="18" charset="0"/>
-              </a:rPr>
-              <a:t> B., </a:t>
-            </a:r>
-            <a:r>
-              <a:rPr lang="en-US" i="1" dirty="0" err="1">
-                <a:latin typeface="Times New Roman" panose="02020603050405020304" pitchFamily="18" charset="0"/>
-                <a:cs typeface="Times New Roman" panose="02020603050405020304" pitchFamily="18" charset="0"/>
-              </a:rPr>
-              <a:t>Tibshirani</a:t>
-            </a:r>
-            <a:r>
-              <a:rPr lang="en-US" i="1" dirty="0">
-                <a:latin typeface="Times New Roman" panose="02020603050405020304" pitchFamily="18" charset="0"/>
-                <a:cs typeface="Times New Roman" panose="02020603050405020304" pitchFamily="18" charset="0"/>
-              </a:rPr>
-              <a:t> R. </a:t>
-            </a:r>
-            <a:r>
-              <a:rPr lang="en-US" dirty="0">
-                <a:latin typeface="Times New Roman" panose="02020603050405020304" pitchFamily="18" charset="0"/>
-                <a:cs typeface="Times New Roman" panose="02020603050405020304" pitchFamily="18" charset="0"/>
-              </a:rPr>
-              <a:t>Improvements on cross-validation: the 632+ bootstrap method // J. Am. Stat. Assoc. 1997. V. 92(438). P. 548–560.</a:t>
-            </a:r>
-            <a:endParaRPr lang="ru-RU" dirty="0">
-              <a:latin typeface="Times New Roman" panose="02020603050405020304" pitchFamily="18" charset="0"/>
-              <a:cs typeface="Times New Roman" panose="02020603050405020304" pitchFamily="18" charset="0"/>
-            </a:endParaRPr>
-          </a:p>
-        </p:txBody>
-      </p:sp>
-    </p:spTree>
-    <p:extLst>
-      <p:ext uri="{BB962C8B-B14F-4D97-AF65-F5344CB8AC3E}">
-        <p14:creationId xmlns:p14="http://schemas.microsoft.com/office/powerpoint/2010/main" val="3183120668"/>
       </p:ext>
     </p:extLst>
   </p:cSld>
@@ -9655,8 +9002,8 @@
           </a:p>
         </p:txBody>
       </p:sp>
-      <mc:AlternateContent xmlns:mc="http://schemas.openxmlformats.org/markup-compatibility/2006">
-        <mc:Choice xmlns:a14="http://schemas.microsoft.com/office/drawing/2010/main" Requires="a14">
+      <mc:AlternateContent xmlns:mc="http://schemas.openxmlformats.org/markup-compatibility/2006" xmlns:a14="http://schemas.microsoft.com/office/drawing/2010/main">
+        <mc:Choice Requires="a14">
           <p:sp>
             <p:nvSpPr>
               <p:cNvPr id="3" name="TextBox 2">
@@ -9724,34 +9071,6 @@
                     <a:cs typeface="Times New Roman" panose="02020603050405020304" pitchFamily="18" charset="0"/>
                   </a:rPr>
                   <a:t>Розенблата-Парзена</a:t>
-                </a:r>
-                <a:r>
-                  <a:rPr lang="ru-RU" dirty="0">
-                    <a:latin typeface="Times New Roman" panose="02020603050405020304" pitchFamily="18" charset="0"/>
-                    <a:cs typeface="Times New Roman" panose="02020603050405020304" pitchFamily="18" charset="0"/>
-                  </a:rPr>
-                  <a:t> </a:t>
-                </a:r>
-                <a:r>
-                  <a:rPr lang="en-US" dirty="0">
-                    <a:latin typeface="Times New Roman" panose="02020603050405020304" pitchFamily="18" charset="0"/>
-                    <a:cs typeface="Times New Roman" panose="02020603050405020304" pitchFamily="18" charset="0"/>
-                  </a:rPr>
-                  <a:t>[</a:t>
-                </a:r>
-                <a:r>
-                  <a:rPr lang="ru-RU" dirty="0">
-                    <a:latin typeface="Times New Roman" panose="02020603050405020304" pitchFamily="18" charset="0"/>
-                    <a:cs typeface="Times New Roman" panose="02020603050405020304" pitchFamily="18" charset="0"/>
-                  </a:rPr>
-                  <a:t>2, 3</a:t>
-                </a:r>
-                <a:r>
-                  <a:rPr lang="en-US" dirty="0">
-                    <a:latin typeface="Times New Roman" panose="02020603050405020304" pitchFamily="18" charset="0"/>
-                    <a:cs typeface="Times New Roman" panose="02020603050405020304" pitchFamily="18" charset="0"/>
-                  </a:rPr>
-                  <a:t>]</a:t>
                 </a:r>
                 <a:r>
                   <a:rPr lang="ru-RU" dirty="0">
@@ -10799,35 +10118,7 @@
                     <a:latin typeface="Times New Roman" panose="02020603050405020304" pitchFamily="18" charset="0"/>
                     <a:cs typeface="Times New Roman" panose="02020603050405020304" pitchFamily="18" charset="0"/>
                   </a:rPr>
-                  <a:t>-Ватсона</a:t>
-                </a:r>
-                <a:r>
-                  <a:rPr lang="en-US" dirty="0">
-                    <a:latin typeface="Times New Roman" panose="02020603050405020304" pitchFamily="18" charset="0"/>
-                    <a:cs typeface="Times New Roman" panose="02020603050405020304" pitchFamily="18" charset="0"/>
-                  </a:rPr>
-                  <a:t> [</a:t>
-                </a:r>
-                <a:r>
-                  <a:rPr lang="ru-RU" dirty="0">
-                    <a:latin typeface="Times New Roman" panose="02020603050405020304" pitchFamily="18" charset="0"/>
-                    <a:cs typeface="Times New Roman" panose="02020603050405020304" pitchFamily="18" charset="0"/>
-                  </a:rPr>
-                  <a:t>4, 5</a:t>
-                </a:r>
-                <a:r>
-                  <a:rPr lang="en-US" dirty="0">
-                    <a:latin typeface="Times New Roman" panose="02020603050405020304" pitchFamily="18" charset="0"/>
-                    <a:cs typeface="Times New Roman" panose="02020603050405020304" pitchFamily="18" charset="0"/>
-                  </a:rPr>
-                  <a:t>]</a:t>
-                </a:r>
-                <a:r>
-                  <a:rPr lang="ru-RU" dirty="0">
-                    <a:latin typeface="Times New Roman" panose="02020603050405020304" pitchFamily="18" charset="0"/>
-                    <a:cs typeface="Times New Roman" panose="02020603050405020304" pitchFamily="18" charset="0"/>
-                  </a:rPr>
-                  <a:t>:</a:t>
+                  <a:t>-Ватсона:</a:t>
                 </a:r>
                 <a:endParaRPr lang="en-US" dirty="0">
                   <a:latin typeface="Times New Roman" panose="02020603050405020304" pitchFamily="18" charset="0"/>
@@ -10837,7 +10128,7 @@
             </p:txBody>
           </p:sp>
         </mc:Choice>
-        <mc:Fallback>
+        <mc:Fallback xmlns="">
           <p:sp>
             <p:nvSpPr>
               <p:cNvPr id="3" name="TextBox 2">
@@ -11808,7 +11099,14 @@
                     <a:latin typeface="Times New Roman" panose="02020603050405020304" pitchFamily="18" charset="0"/>
                     <a:cs typeface="Times New Roman" panose="02020603050405020304" pitchFamily="18" charset="0"/>
                   </a:rPr>
-                  <a:t>) </a:t>
+                  <a:t>)</a:t>
+                </a:r>
+                <a:r>
+                  <a:rPr lang="en-US" b="1" dirty="0">
+                    <a:latin typeface="Times New Roman" panose="02020603050405020304" pitchFamily="18" charset="0"/>
+                    <a:cs typeface="Times New Roman" panose="02020603050405020304" pitchFamily="18" charset="0"/>
+                  </a:rPr>
+                  <a:t> </a:t>
                 </a:r>
                 <a:r>
                   <a:rPr lang="ru-RU" dirty="0">
@@ -12030,21 +11328,7 @@
                     <a:latin typeface="Times New Roman" panose="02020603050405020304" pitchFamily="18" charset="0"/>
                     <a:cs typeface="Times New Roman" panose="02020603050405020304" pitchFamily="18" charset="0"/>
                   </a:rPr>
-                  <a:t>Основы классического энтропийного метода</a:t>
-                </a:r>
-                <a:r>
-                  <a:rPr lang="en-US" b="1" dirty="0">
-                    <a:latin typeface="Times New Roman" panose="02020603050405020304" pitchFamily="18" charset="0"/>
-                    <a:cs typeface="Times New Roman" panose="02020603050405020304" pitchFamily="18" charset="0"/>
-                  </a:rPr>
-                  <a:t> [2]</a:t>
-                </a:r>
-                <a:r>
-                  <a:rPr lang="ru-RU" b="1" dirty="0">
-                    <a:latin typeface="Times New Roman" panose="02020603050405020304" pitchFamily="18" charset="0"/>
-                    <a:cs typeface="Times New Roman" panose="02020603050405020304" pitchFamily="18" charset="0"/>
-                  </a:rPr>
-                  <a:t>: </a:t>
+                  <a:t>Основы классического энтропийного метода: </a:t>
                 </a:r>
               </a:p>
               <a:p>
@@ -13216,21 +12500,7 @@
                     <a:latin typeface="Times New Roman" panose="02020603050405020304" pitchFamily="18" charset="0"/>
                     <a:cs typeface="Times New Roman" panose="02020603050405020304" pitchFamily="18" charset="0"/>
                   </a:rPr>
-                  <a:t> норма разности невязки </a:t>
-                </a:r>
-                <a:r>
-                  <a:rPr lang="en-US" dirty="0">
-                    <a:latin typeface="Times New Roman" panose="02020603050405020304" pitchFamily="18" charset="0"/>
-                    <a:cs typeface="Times New Roman" panose="02020603050405020304" pitchFamily="18" charset="0"/>
-                  </a:rPr>
-                  <a:t>[3]</a:t>
-                </a:r>
-                <a:r>
-                  <a:rPr lang="ru-RU" dirty="0">
-                    <a:latin typeface="Times New Roman" panose="02020603050405020304" pitchFamily="18" charset="0"/>
-                    <a:cs typeface="Times New Roman" panose="02020603050405020304" pitchFamily="18" charset="0"/>
-                  </a:rPr>
-                  <a:t>:</a:t>
+                  <a:t> норма разности невязки:</a:t>
                 </a:r>
               </a:p>
               <a:p>
@@ -13611,21 +12881,7 @@
                     <a:latin typeface="Times New Roman" panose="02020603050405020304" pitchFamily="18" charset="0"/>
                     <a:cs typeface="Times New Roman" panose="02020603050405020304" pitchFamily="18" charset="0"/>
                   </a:rPr>
-                  <a:t>, объединяющего энтропию, «эмпирический риск» [</a:t>
-                </a:r>
-                <a:r>
-                  <a:rPr lang="en-US" dirty="0">
-                    <a:latin typeface="Times New Roman" panose="02020603050405020304" pitchFamily="18" charset="0"/>
-                    <a:cs typeface="Times New Roman" panose="02020603050405020304" pitchFamily="18" charset="0"/>
-                  </a:rPr>
-                  <a:t>4</a:t>
-                </a:r>
-                <a:r>
-                  <a:rPr lang="ru-RU" dirty="0">
-                    <a:latin typeface="Times New Roman" panose="02020603050405020304" pitchFamily="18" charset="0"/>
-                    <a:cs typeface="Times New Roman" panose="02020603050405020304" pitchFamily="18" charset="0"/>
-                  </a:rPr>
-                  <a:t>] и среднюю норму ошибок, при условиях нормировки </a:t>
+                  <a:t>, объединяющего энтропию, «эмпирический риск» и среднюю норму ошибок, при условиях нормировки </a:t>
                 </a:r>
                 <a14:m>
                   <m:oMath xmlns:m="http://schemas.openxmlformats.org/officeDocument/2006/math">
@@ -15075,7 +14331,7 @@
               <p:nvPr>
                 <p:extLst>
                   <p:ext uri="{D42A27DB-BD31-4B8C-83A1-F6EECF244321}">
-                    <p14:modId xmlns:p14="http://schemas.microsoft.com/office/powerpoint/2010/main" val="1750430563"/>
+                    <p14:modId xmlns:p14="http://schemas.microsoft.com/office/powerpoint/2010/main" val="726061255"/>
                   </p:ext>
                 </p:extLst>
               </p:nvPr>
@@ -15683,26 +14939,6 @@
                             </a:rPr>
                             <a:t>бутстрап</a:t>
                           </a:r>
-                          <a:r>
-                            <a:rPr lang="ru-RU" dirty="0">
-                              <a:solidFill>
-                                <a:schemeClr val="tx1"/>
-                              </a:solidFill>
-                              <a:latin typeface="Times New Roman" panose="02020603050405020304" pitchFamily="18" charset="0"/>
-                              <a:cs typeface="Times New Roman" panose="02020603050405020304" pitchFamily="18" charset="0"/>
-                            </a:rPr>
-                            <a:t> </a:t>
-                          </a:r>
-                          <a:r>
-                            <a:rPr lang="en-US" dirty="0">
-                              <a:solidFill>
-                                <a:schemeClr val="tx1"/>
-                              </a:solidFill>
-                              <a:latin typeface="Times New Roman" panose="02020603050405020304" pitchFamily="18" charset="0"/>
-                              <a:cs typeface="Times New Roman" panose="02020603050405020304" pitchFamily="18" charset="0"/>
-                            </a:rPr>
-                            <a:t>[5]</a:t>
-                          </a:r>
                           <a:endParaRPr lang="ru-RU" dirty="0">
                             <a:solidFill>
                               <a:schemeClr val="tx1"/>
@@ -15887,7 +15123,7 @@
               <p:nvPr>
                 <p:extLst>
                   <p:ext uri="{D42A27DB-BD31-4B8C-83A1-F6EECF244321}">
-                    <p14:modId xmlns:p14="http://schemas.microsoft.com/office/powerpoint/2010/main" val="1750430563"/>
+                    <p14:modId xmlns:p14="http://schemas.microsoft.com/office/powerpoint/2010/main" val="726061255"/>
                   </p:ext>
                 </p:extLst>
               </p:nvPr>
@@ -16276,26 +15512,6 @@
                               <a:cs typeface="Times New Roman" panose="02020603050405020304" pitchFamily="18" charset="0"/>
                             </a:rPr>
                             <a:t>бутстрап</a:t>
-                          </a:r>
-                          <a:r>
-                            <a:rPr lang="ru-RU" dirty="0">
-                              <a:solidFill>
-                                <a:schemeClr val="tx1"/>
-                              </a:solidFill>
-                              <a:latin typeface="Times New Roman" panose="02020603050405020304" pitchFamily="18" charset="0"/>
-                              <a:cs typeface="Times New Roman" panose="02020603050405020304" pitchFamily="18" charset="0"/>
-                            </a:rPr>
-                            <a:t> </a:t>
-                          </a:r>
-                          <a:r>
-                            <a:rPr lang="en-US" dirty="0">
-                              <a:solidFill>
-                                <a:schemeClr val="tx1"/>
-                              </a:solidFill>
-                              <a:latin typeface="Times New Roman" panose="02020603050405020304" pitchFamily="18" charset="0"/>
-                              <a:cs typeface="Times New Roman" panose="02020603050405020304" pitchFamily="18" charset="0"/>
-                            </a:rPr>
-                            <a:t>[5]</a:t>
                           </a:r>
                           <a:endParaRPr lang="ru-RU" dirty="0">
                             <a:solidFill>

--- a/Защита диплома/Anfimov_diplom.pptx
+++ b/Защита диплома/Anfimov_diplom.pptx
@@ -215,7 +215,7 @@
           <a:p>
             <a:fld id="{C5626634-CE2F-4DD7-8FF3-A2AF8CEFAA4F}" type="datetimeFigureOut">
               <a:rPr lang="ru-RU" smtClean="0"/>
-              <a:t>30.04.2026</a:t>
+              <a:t>21.05.2026</a:t>
             </a:fld>
             <a:endParaRPr lang="ru-RU"/>
           </a:p>
@@ -729,7 +729,7 @@
           <a:p>
             <a:fld id="{D4C78990-BC74-4702-B11E-A02B45A34803}" type="datetimeFigureOut">
               <a:rPr lang="ru-RU" smtClean="0"/>
-              <a:t>30.04.2026</a:t>
+              <a:t>21.05.2026</a:t>
             </a:fld>
             <a:endParaRPr lang="ru-RU"/>
           </a:p>
@@ -899,7 +899,7 @@
           <a:p>
             <a:fld id="{D4C78990-BC74-4702-B11E-A02B45A34803}" type="datetimeFigureOut">
               <a:rPr lang="ru-RU" smtClean="0"/>
-              <a:t>30.04.2026</a:t>
+              <a:t>21.05.2026</a:t>
             </a:fld>
             <a:endParaRPr lang="ru-RU"/>
           </a:p>
@@ -1079,7 +1079,7 @@
           <a:p>
             <a:fld id="{D4C78990-BC74-4702-B11E-A02B45A34803}" type="datetimeFigureOut">
               <a:rPr lang="ru-RU" smtClean="0"/>
-              <a:t>30.04.2026</a:t>
+              <a:t>21.05.2026</a:t>
             </a:fld>
             <a:endParaRPr lang="ru-RU"/>
           </a:p>
@@ -1249,7 +1249,7 @@
           <a:p>
             <a:fld id="{D4C78990-BC74-4702-B11E-A02B45A34803}" type="datetimeFigureOut">
               <a:rPr lang="ru-RU" smtClean="0"/>
-              <a:t>30.04.2026</a:t>
+              <a:t>21.05.2026</a:t>
             </a:fld>
             <a:endParaRPr lang="ru-RU"/>
           </a:p>
@@ -1517,7 +1517,7 @@
           <a:p>
             <a:fld id="{D4C78990-BC74-4702-B11E-A02B45A34803}" type="datetimeFigureOut">
               <a:rPr lang="ru-RU" smtClean="0"/>
-              <a:t>30.04.2026</a:t>
+              <a:t>21.05.2026</a:t>
             </a:fld>
             <a:endParaRPr lang="ru-RU"/>
           </a:p>
@@ -1749,7 +1749,7 @@
           <a:p>
             <a:fld id="{D4C78990-BC74-4702-B11E-A02B45A34803}" type="datetimeFigureOut">
               <a:rPr lang="ru-RU" smtClean="0"/>
-              <a:t>30.04.2026</a:t>
+              <a:t>21.05.2026</a:t>
             </a:fld>
             <a:endParaRPr lang="ru-RU"/>
           </a:p>
@@ -2108,7 +2108,7 @@
           <a:p>
             <a:fld id="{D4C78990-BC74-4702-B11E-A02B45A34803}" type="datetimeFigureOut">
               <a:rPr lang="ru-RU" smtClean="0"/>
-              <a:t>30.04.2026</a:t>
+              <a:t>21.05.2026</a:t>
             </a:fld>
             <a:endParaRPr lang="ru-RU"/>
           </a:p>
@@ -2249,7 +2249,7 @@
           <a:p>
             <a:fld id="{D4C78990-BC74-4702-B11E-A02B45A34803}" type="datetimeFigureOut">
               <a:rPr lang="ru-RU" smtClean="0"/>
-              <a:t>30.04.2026</a:t>
+              <a:t>21.05.2026</a:t>
             </a:fld>
             <a:endParaRPr lang="ru-RU"/>
           </a:p>
@@ -2344,7 +2344,7 @@
           <a:p>
             <a:fld id="{D4C78990-BC74-4702-B11E-A02B45A34803}" type="datetimeFigureOut">
               <a:rPr lang="ru-RU" smtClean="0"/>
-              <a:t>30.04.2026</a:t>
+              <a:t>21.05.2026</a:t>
             </a:fld>
             <a:endParaRPr lang="ru-RU"/>
           </a:p>
@@ -2701,7 +2701,7 @@
           <a:p>
             <a:fld id="{D4C78990-BC74-4702-B11E-A02B45A34803}" type="datetimeFigureOut">
               <a:rPr lang="ru-RU" smtClean="0"/>
-              <a:t>30.04.2026</a:t>
+              <a:t>21.05.2026</a:t>
             </a:fld>
             <a:endParaRPr lang="ru-RU"/>
           </a:p>
@@ -3058,7 +3058,7 @@
           <a:p>
             <a:fld id="{D4C78990-BC74-4702-B11E-A02B45A34803}" type="datetimeFigureOut">
               <a:rPr lang="ru-RU" smtClean="0"/>
-              <a:t>30.04.2026</a:t>
+              <a:t>21.05.2026</a:t>
             </a:fld>
             <a:endParaRPr lang="ru-RU"/>
           </a:p>
@@ -3300,7 +3300,7 @@
           <a:p>
             <a:fld id="{D4C78990-BC74-4702-B11E-A02B45A34803}" type="datetimeFigureOut">
               <a:rPr lang="ru-RU" smtClean="0"/>
-              <a:t>30.04.2026</a:t>
+              <a:t>21.05.2026</a:t>
             </a:fld>
             <a:endParaRPr lang="ru-RU"/>
           </a:p>
@@ -4017,7 +4017,7 @@
                 <a:latin typeface="Times New Roman" panose="02020603050405020304" pitchFamily="18" charset="0"/>
                 <a:cs typeface="Times New Roman" panose="02020603050405020304" pitchFamily="18" charset="0"/>
               </a:rPr>
-              <a:t>Дата: 23.05.2026</a:t>
+              <a:t>Дата: 20.05.2026</a:t>
             </a:r>
             <a:endParaRPr lang="en-US" dirty="0">
               <a:solidFill>
@@ -4362,6 +4362,36 @@
                 <a:cs typeface="Times New Roman" panose="02020603050405020304" pitchFamily="18" charset="0"/>
               </a:rPr>
               <a:t>IQR</a:t>
+            </a:r>
+            <a:r>
+              <a:rPr lang="ru-RU" b="1" dirty="0">
+                <a:solidFill>
+                  <a:srgbClr val="1D1D1F"/>
+                </a:solidFill>
+                <a:latin typeface="Times New Roman" panose="02020603050405020304" pitchFamily="18" charset="0"/>
+                <a:cs typeface="Times New Roman" panose="02020603050405020304" pitchFamily="18" charset="0"/>
+              </a:rPr>
+              <a:t> (1,5 </a:t>
+            </a:r>
+            <a:r>
+              <a:rPr lang="ru-RU" b="1" dirty="0" err="1">
+                <a:solidFill>
+                  <a:srgbClr val="1D1D1F"/>
+                </a:solidFill>
+                <a:latin typeface="Times New Roman" panose="02020603050405020304" pitchFamily="18" charset="0"/>
+                <a:cs typeface="Times New Roman" panose="02020603050405020304" pitchFamily="18" charset="0"/>
+              </a:rPr>
+              <a:t>межквартильных</a:t>
+            </a:r>
+            <a:r>
+              <a:rPr lang="ru-RU" b="1" dirty="0">
+                <a:solidFill>
+                  <a:srgbClr val="1D1D1F"/>
+                </a:solidFill>
+                <a:latin typeface="Times New Roman" panose="02020603050405020304" pitchFamily="18" charset="0"/>
+                <a:cs typeface="Times New Roman" panose="02020603050405020304" pitchFamily="18" charset="0"/>
+              </a:rPr>
+              <a:t> разброса)</a:t>
             </a:r>
             <a:r>
               <a:rPr lang="ru-RU" dirty="0">
@@ -4637,8 +4667,8 @@
           <a:chExt cx="0" cy="0"/>
         </a:xfrm>
       </p:grpSpPr>
-      <mc:AlternateContent xmlns:mc="http://schemas.openxmlformats.org/markup-compatibility/2006">
-        <mc:Choice xmlns:a14="http://schemas.microsoft.com/office/drawing/2010/main" Requires="a14">
+      <mc:AlternateContent xmlns:mc="http://schemas.openxmlformats.org/markup-compatibility/2006" xmlns:a14="http://schemas.microsoft.com/office/drawing/2010/main">
+        <mc:Choice Requires="a14">
           <p:sp>
             <p:nvSpPr>
               <p:cNvPr id="3" name="TextBox 2">
@@ -4860,7 +4890,7 @@
             </p:txBody>
           </p:sp>
         </mc:Choice>
-        <mc:Fallback>
+        <mc:Fallback xmlns="">
           <p:sp>
             <p:nvSpPr>
               <p:cNvPr id="3" name="TextBox 2">
@@ -7659,8 +7689,8 @@
         </p:nvSpPr>
         <p:spPr>
           <a:xfrm>
-            <a:off x="5018237" y="0"/>
-            <a:ext cx="2155526" cy="523220"/>
+            <a:off x="3204375" y="130629"/>
+            <a:ext cx="5783250" cy="523220"/>
           </a:xfrm>
           <a:prstGeom prst="rect">
             <a:avLst/>
@@ -7678,13 +7708,13 @@
                 <a:latin typeface="Times New Roman" panose="02020603050405020304" pitchFamily="18" charset="0"/>
                 <a:cs typeface="Times New Roman" panose="02020603050405020304" pitchFamily="18" charset="0"/>
               </a:rPr>
-              <a:t>Заключение</a:t>
+              <a:t>Положения выносимые на защиту</a:t>
             </a:r>
           </a:p>
         </p:txBody>
       </p:sp>
-      <mc:AlternateContent xmlns:mc="http://schemas.openxmlformats.org/markup-compatibility/2006" xmlns:a14="http://schemas.microsoft.com/office/drawing/2010/main">
-        <mc:Choice Requires="a14">
+      <mc:AlternateContent xmlns:mc="http://schemas.openxmlformats.org/markup-compatibility/2006">
+        <mc:Choice xmlns:a14="http://schemas.microsoft.com/office/drawing/2010/main" Requires="a14">
           <p:sp>
             <p:nvSpPr>
               <p:cNvPr id="3" name="TextBox 2">
@@ -7699,8 +7729,8 @@
             </p:nvSpPr>
             <p:spPr>
               <a:xfrm>
-                <a:off x="387790" y="523220"/>
-                <a:ext cx="11416420" cy="4907113"/>
+                <a:off x="387790" y="796353"/>
+                <a:ext cx="11416420" cy="5513304"/>
               </a:xfrm>
               <a:prstGeom prst="rect">
                 <a:avLst/>
@@ -7712,20 +7742,6 @@
                 <a:spAutoFit/>
               </a:bodyPr>
               <a:lstStyle/>
-              <a:p>
-                <a:pPr algn="just">
-                  <a:lnSpc>
-                    <a:spcPct val="250000"/>
-                  </a:lnSpc>
-                </a:pPr>
-                <a:r>
-                  <a:rPr lang="ru-RU" b="1" dirty="0">
-                    <a:latin typeface="Times New Roman" panose="02020603050405020304" pitchFamily="18" charset="0"/>
-                    <a:cs typeface="Times New Roman" panose="02020603050405020304" pitchFamily="18" charset="0"/>
-                  </a:rPr>
-                  <a:t>Выводы:</a:t>
-                </a:r>
-              </a:p>
               <a:p>
                 <a:pPr marL="285750" indent="-285750" algn="just">
                   <a:lnSpc>
@@ -7739,28 +7755,21 @@
                     <a:latin typeface="Times New Roman" panose="02020603050405020304" pitchFamily="18" charset="0"/>
                     <a:cs typeface="Times New Roman" panose="02020603050405020304" pitchFamily="18" charset="0"/>
                   </a:rPr>
-                  <a:t>Энтропийный метод с «мягкой» рандомизацией </a:t>
+                  <a:t>Метод «мягкой» энтропийной рандомизации </a:t>
                 </a:r>
                 <a:r>
                   <a:rPr lang="ru-RU" b="1" dirty="0">
                     <a:latin typeface="Times New Roman" panose="02020603050405020304" pitchFamily="18" charset="0"/>
                     <a:cs typeface="Times New Roman" panose="02020603050405020304" pitchFamily="18" charset="0"/>
                   </a:rPr>
-                  <a:t>эффективен на малых выборках </a:t>
+                  <a:t>обеспечивает робастные оценки регрессии </a:t>
                 </a:r>
                 <a:r>
                   <a:rPr lang="ru-RU" dirty="0">
                     <a:latin typeface="Times New Roman" panose="02020603050405020304" pitchFamily="18" charset="0"/>
                     <a:cs typeface="Times New Roman" panose="02020603050405020304" pitchFamily="18" charset="0"/>
                   </a:rPr>
-                  <a:t>и </a:t>
-                </a:r>
-                <a:r>
-                  <a:rPr lang="ru-RU" b="1" dirty="0">
-                    <a:latin typeface="Times New Roman" panose="02020603050405020304" pitchFamily="18" charset="0"/>
-                    <a:cs typeface="Times New Roman" panose="02020603050405020304" pitchFamily="18" charset="0"/>
-                  </a:rPr>
-                  <a:t>робастен к распределению ошибок</a:t>
+                  <a:t>на малых выборках (n ≤ 30) без априорных предположений о распределении ошибок</a:t>
                 </a:r>
                 <a:r>
                   <a:rPr lang="en-US" dirty="0">
@@ -7866,7 +7875,29 @@
                     <a:latin typeface="Times New Roman" panose="02020603050405020304" pitchFamily="18" charset="0"/>
                     <a:cs typeface="Times New Roman" panose="02020603050405020304" pitchFamily="18" charset="0"/>
                   </a:rPr>
-                  <a:t>На реальных данных метод конкурентоспособен, уступая на 3–4% ядерным методам по выбранным метрикам;</a:t>
+                  <a:t>На реальных данных метод </a:t>
+                </a:r>
+                <a:r>
+                  <a:rPr lang="ru-RU" b="1" i="0" dirty="0">
+                    <a:solidFill>
+                      <a:srgbClr val="1D1D1F"/>
+                    </a:solidFill>
+                    <a:effectLst/>
+                    <a:latin typeface="Times New Roman" panose="02020603050405020304" pitchFamily="18" charset="0"/>
+                    <a:cs typeface="Times New Roman" panose="02020603050405020304" pitchFamily="18" charset="0"/>
+                  </a:rPr>
+                  <a:t>показывает сопоставимую точность </a:t>
+                </a:r>
+                <a:r>
+                  <a:rPr lang="ru-RU" b="0" i="0" dirty="0">
+                    <a:solidFill>
+                      <a:srgbClr val="1D1D1F"/>
+                    </a:solidFill>
+                    <a:effectLst/>
+                    <a:latin typeface="Times New Roman" panose="02020603050405020304" pitchFamily="18" charset="0"/>
+                    <a:cs typeface="Times New Roman" panose="02020603050405020304" pitchFamily="18" charset="0"/>
+                  </a:rPr>
+                  <a:t>с непараметрическими аналогами, подтверждая практическую применимость;</a:t>
                 </a:r>
               </a:p>
               <a:p>
@@ -7879,143 +7910,29 @@
                 </a:pPr>
                 <a:r>
                   <a:rPr lang="ru-RU" dirty="0">
+                    <a:solidFill>
+                      <a:srgbClr val="1D1D1F"/>
+                    </a:solidFill>
                     <a:latin typeface="Times New Roman" panose="02020603050405020304" pitchFamily="18" charset="0"/>
                     <a:cs typeface="Times New Roman" panose="02020603050405020304" pitchFamily="18" charset="0"/>
                   </a:rPr>
-                  <a:t>Наибольший выигрыш для </a:t>
+                  <a:t>Наибольшая эффективность метода достигается при аппроксимации зависимостей </a:t>
                 </a:r>
                 <a:r>
                   <a:rPr lang="ru-RU" b="1" dirty="0">
+                    <a:solidFill>
+                      <a:srgbClr val="1D1D1F"/>
+                    </a:solidFill>
                     <a:latin typeface="Times New Roman" panose="02020603050405020304" pitchFamily="18" charset="0"/>
                     <a:cs typeface="Times New Roman" panose="02020603050405020304" pitchFamily="18" charset="0"/>
                   </a:rPr>
-                  <a:t>низкого уровня шума </a:t>
-                </a:r>
-                <a14:m>
-                  <m:oMath xmlns:m="http://schemas.openxmlformats.org/officeDocument/2006/math">
-                    <m:d>
-                      <m:dPr>
-                        <m:ctrlPr>
-                          <a:rPr lang="en-US" b="1" i="1" smtClean="0">
-                            <a:latin typeface="Cambria Math" panose="02040503050406030204" pitchFamily="18" charset="0"/>
-                          </a:rPr>
-                        </m:ctrlPr>
-                      </m:dPr>
-                      <m:e>
-                        <m:sSup>
-                          <m:sSupPr>
-                            <m:ctrlPr>
-                              <a:rPr lang="en-US" b="1" i="1" smtClean="0">
-                                <a:latin typeface="Cambria Math" panose="02040503050406030204" pitchFamily="18" charset="0"/>
-                              </a:rPr>
-                            </m:ctrlPr>
-                          </m:sSupPr>
-                          <m:e>
-                            <m:r>
-                              <a:rPr lang="en-US" b="1" i="1" smtClean="0">
-                                <a:latin typeface="Cambria Math" panose="02040503050406030204" pitchFamily="18" charset="0"/>
-                              </a:rPr>
-                              <m:t>𝑹</m:t>
-                            </m:r>
-                          </m:e>
-                          <m:sup>
-                            <m:r>
-                              <a:rPr lang="en-US" b="1" i="1" smtClean="0">
-                                <a:latin typeface="Cambria Math" panose="02040503050406030204" pitchFamily="18" charset="0"/>
-                              </a:rPr>
-                              <m:t>𝟐</m:t>
-                            </m:r>
-                          </m:sup>
-                        </m:sSup>
-                        <m:r>
-                          <a:rPr lang="en-US" b="1" i="1" smtClean="0">
-                            <a:latin typeface="Cambria Math" panose="02040503050406030204" pitchFamily="18" charset="0"/>
-                          </a:rPr>
-                          <m:t>=</m:t>
-                        </m:r>
-                        <m:r>
-                          <a:rPr lang="en-US" b="1" i="1" smtClean="0">
-                            <a:latin typeface="Cambria Math" panose="02040503050406030204" pitchFamily="18" charset="0"/>
-                          </a:rPr>
-                          <m:t>𝟎</m:t>
-                        </m:r>
-                        <m:r>
-                          <a:rPr lang="en-US" b="1" i="1" smtClean="0">
-                            <a:latin typeface="Cambria Math" panose="02040503050406030204" pitchFamily="18" charset="0"/>
-                          </a:rPr>
-                          <m:t>.</m:t>
-                        </m:r>
-                        <m:r>
-                          <a:rPr lang="en-US" b="1" i="1" smtClean="0">
-                            <a:latin typeface="Cambria Math" panose="02040503050406030204" pitchFamily="18" charset="0"/>
-                          </a:rPr>
-                          <m:t>𝟗𝟓</m:t>
-                        </m:r>
-                      </m:e>
-                    </m:d>
-                  </m:oMath>
-                </a14:m>
-                <a:r>
-                  <a:rPr lang="ru-RU" b="1" dirty="0">
-                    <a:latin typeface="Times New Roman" panose="02020603050405020304" pitchFamily="18" charset="0"/>
-                    <a:cs typeface="Times New Roman" panose="02020603050405020304" pitchFamily="18" charset="0"/>
-                  </a:rPr>
-                  <a:t> </a:t>
-                </a:r>
-                <a:r>
-                  <a:rPr lang="ru-RU" dirty="0">
-                    <a:latin typeface="Times New Roman" panose="02020603050405020304" pitchFamily="18" charset="0"/>
-                    <a:cs typeface="Times New Roman" panose="02020603050405020304" pitchFamily="18" charset="0"/>
-                  </a:rPr>
-                  <a:t>и</a:t>
-                </a:r>
-                <a:r>
-                  <a:rPr lang="ru-RU" b="1" dirty="0">
-                    <a:latin typeface="Times New Roman" panose="02020603050405020304" pitchFamily="18" charset="0"/>
-                    <a:cs typeface="Times New Roman" panose="02020603050405020304" pitchFamily="18" charset="0"/>
-                  </a:rPr>
-                  <a:t> полиномов низкой степени</a:t>
-                </a:r>
-                <a:r>
-                  <a:rPr lang="ru-RU" dirty="0">
-                    <a:latin typeface="Times New Roman" panose="02020603050405020304" pitchFamily="18" charset="0"/>
-                    <a:cs typeface="Times New Roman" panose="02020603050405020304" pitchFamily="18" charset="0"/>
-                  </a:rPr>
-                  <a:t> </a:t>
-                </a:r>
-                <a:r>
-                  <a:rPr lang="ru-RU" b="1" dirty="0">
-                    <a:latin typeface="Times New Roman" panose="02020603050405020304" pitchFamily="18" charset="0"/>
-                    <a:cs typeface="Times New Roman" panose="02020603050405020304" pitchFamily="18" charset="0"/>
-                  </a:rPr>
-                  <a:t>(</a:t>
-                </a:r>
-                <a:r>
-                  <a:rPr lang="en-US" b="1" dirty="0">
-                    <a:latin typeface="Times New Roman" panose="02020603050405020304" pitchFamily="18" charset="0"/>
-                    <a:cs typeface="Times New Roman" panose="02020603050405020304" pitchFamily="18" charset="0"/>
-                  </a:rPr>
-                  <a:t>2-3</a:t>
-                </a:r>
-                <a:r>
-                  <a:rPr lang="ru-RU" b="1" dirty="0">
-                    <a:latin typeface="Times New Roman" panose="02020603050405020304" pitchFamily="18" charset="0"/>
-                    <a:cs typeface="Times New Roman" panose="02020603050405020304" pitchFamily="18" charset="0"/>
-                  </a:rPr>
-                  <a:t>)</a:t>
-                </a:r>
-                <a:r>
-                  <a:rPr lang="ru-RU" dirty="0">
-                    <a:latin typeface="Times New Roman" panose="02020603050405020304" pitchFamily="18" charset="0"/>
-                    <a:cs typeface="Times New Roman" panose="02020603050405020304" pitchFamily="18" charset="0"/>
-                  </a:rPr>
-                  <a:t>.</a:t>
+                  <a:t>низкой сложности в условиях низкого и среднего уровня шума.</a:t>
                 </a:r>
               </a:p>
             </p:txBody>
           </p:sp>
         </mc:Choice>
-        <mc:Fallback xmlns="">
+        <mc:Fallback>
           <p:sp>
             <p:nvSpPr>
               <p:cNvPr id="3" name="TextBox 2">
@@ -8032,8 +7949,8 @@
             </p:nvSpPr>
             <p:spPr>
               <a:xfrm>
-                <a:off x="387790" y="523220"/>
-                <a:ext cx="11416420" cy="4907113"/>
+                <a:off x="387790" y="796353"/>
+                <a:ext cx="11416420" cy="5513304"/>
               </a:xfrm>
               <a:prstGeom prst="rect">
                 <a:avLst/>
@@ -8041,7 +7958,7 @@
               <a:blipFill>
                 <a:blip r:embed="rId2"/>
                 <a:stretch>
-                  <a:fillRect l="-481" r="-481" b="-621"/>
+                  <a:fillRect l="-374" r="-481" b="-885"/>
                 </a:stretch>
               </a:blipFill>
             </p:spPr>
@@ -8246,7 +8163,7 @@
                 <a:latin typeface="Times New Roman" panose="02020603050405020304" pitchFamily="18" charset="0"/>
                 <a:ea typeface="Calibri" panose="020F0502020204030204" pitchFamily="34" charset="0"/>
               </a:rPr>
-              <a:t>Развитие вычислительных методов для работы с данными большой размерности, связанных с семплированием по методу Монте-Карло</a:t>
+              <a:t>Развитие вычислительных методов, связанных с семплированием по методу Монте-Карло, для работы с данными большой размерности</a:t>
             </a:r>
             <a:r>
               <a:rPr lang="ru-RU" dirty="0">
@@ -8660,7 +8577,7 @@
                 <a:latin typeface="Times New Roman" panose="02020603050405020304" pitchFamily="18" charset="0"/>
                 <a:cs typeface="Times New Roman" panose="02020603050405020304" pitchFamily="18" charset="0"/>
               </a:rPr>
-              <a:t>Классический МНК требует выполнения стандартных условий (нормальность ошибок, достаточный для точности объём выборки)</a:t>
+              <a:t>Классический МНК требует выполнения стандартных условий (нормальность ошибок, достаточный для состоятельности оценок объём выборки)</a:t>
             </a:r>
           </a:p>
           <a:p>
@@ -8722,7 +8639,7 @@
                 <a:latin typeface="Times New Roman" panose="02020603050405020304" pitchFamily="18" charset="0"/>
                 <a:cs typeface="Times New Roman" panose="02020603050405020304" pitchFamily="18" charset="0"/>
               </a:rPr>
-              <a:t>Сравнение с ядерной регрессией на синтетических данных с различными распределениями ошибок</a:t>
+              <a:t>Сравнение с ядерной регрессией на синтетических и реальных данных</a:t>
             </a:r>
           </a:p>
         </p:txBody>
@@ -8778,7 +8695,7 @@
         <p:spPr>
           <a:xfrm>
             <a:off x="3895750" y="0"/>
-            <a:ext cx="4781309" cy="523220"/>
+            <a:ext cx="5242974" cy="523220"/>
           </a:xfrm>
           <a:prstGeom prst="rect">
             <a:avLst/>
@@ -8791,6 +8708,7 @@
           </a:bodyPr>
           <a:lstStyle/>
           <a:p>
+            <a:pPr lvl="1"/>
             <a:r>
               <a:rPr lang="ru-RU" sz="2800" b="1" dirty="0">
                 <a:latin typeface="Times New Roman" panose="02020603050405020304" pitchFamily="18" charset="0"/>
@@ -8816,7 +8734,7 @@
         <p:spPr>
           <a:xfrm>
             <a:off x="578194" y="523220"/>
-            <a:ext cx="11416420" cy="4128310"/>
+            <a:ext cx="11416420" cy="5547929"/>
           </a:xfrm>
           <a:prstGeom prst="rect">
             <a:avLst/>
@@ -8843,30 +8761,30 @@
             </a:r>
           </a:p>
           <a:p>
+            <a:pPr algn="just">
+              <a:lnSpc>
+                <a:spcPct val="250000"/>
+              </a:lnSpc>
+            </a:pPr>
+            <a:r>
+              <a:rPr lang="ru-RU" dirty="0">
+                <a:latin typeface="Times New Roman" panose="02020603050405020304" pitchFamily="18" charset="0"/>
+                <a:cs typeface="Times New Roman" panose="02020603050405020304" pitchFamily="18" charset="0"/>
+              </a:rPr>
+              <a:t>	Разработка и экспериментальное обоснование эффективности энтропийного метода оценивания регрессии с «мягкой» рандомизацией в условиях малых выборок и неопределённости распределения ошибок.</a:t>
+            </a:r>
+            <a:endParaRPr lang="ru-RU" b="1" dirty="0">
+              <a:latin typeface="Times New Roman" panose="02020603050405020304" pitchFamily="18" charset="0"/>
+              <a:cs typeface="Times New Roman" panose="02020603050405020304" pitchFamily="18" charset="0"/>
+            </a:endParaRPr>
+          </a:p>
+          <a:p>
             <a:pPr>
               <a:lnSpc>
                 <a:spcPct val="250000"/>
               </a:lnSpc>
             </a:pPr>
             <a:r>
-              <a:rPr lang="ru-RU" dirty="0">
-                <a:latin typeface="Times New Roman" panose="02020603050405020304" pitchFamily="18" charset="0"/>
-                <a:cs typeface="Times New Roman" panose="02020603050405020304" pitchFamily="18" charset="0"/>
-              </a:rPr>
-              <a:t>Построение робастных оценок регрессии на малых выборках без предположений о виде распределения ошибок</a:t>
-            </a:r>
-            <a:endParaRPr lang="ru-RU" b="1" dirty="0">
-              <a:latin typeface="Times New Roman" panose="02020603050405020304" pitchFamily="18" charset="0"/>
-              <a:cs typeface="Times New Roman" panose="02020603050405020304" pitchFamily="18" charset="0"/>
-            </a:endParaRPr>
-          </a:p>
-          <a:p>
-            <a:pPr>
-              <a:lnSpc>
-                <a:spcPct val="250000"/>
-              </a:lnSpc>
-            </a:pPr>
-            <a:r>
               <a:rPr lang="ru-RU" b="1" dirty="0">
                 <a:latin typeface="Times New Roman" panose="02020603050405020304" pitchFamily="18" charset="0"/>
                 <a:cs typeface="Times New Roman" panose="02020603050405020304" pitchFamily="18" charset="0"/>
@@ -8877,54 +8795,113 @@
           <a:p>
             <a:pPr marL="342900" indent="-342900">
               <a:lnSpc>
-                <a:spcPct val="250000"/>
+                <a:spcPct val="200000"/>
               </a:lnSpc>
               <a:buFont typeface="+mj-lt"/>
               <a:buAutoNum type="arabicPeriod"/>
             </a:pPr>
             <a:r>
+              <a:rPr lang="ru-RU" b="1" dirty="0">
+                <a:latin typeface="Times New Roman" panose="02020603050405020304" pitchFamily="18" charset="0"/>
+                <a:cs typeface="Times New Roman" panose="02020603050405020304" pitchFamily="18" charset="0"/>
+              </a:rPr>
+              <a:t>Разработать</a:t>
+            </a:r>
+            <a:r>
               <a:rPr lang="ru-RU" dirty="0">
                 <a:latin typeface="Times New Roman" panose="02020603050405020304" pitchFamily="18" charset="0"/>
                 <a:cs typeface="Times New Roman" panose="02020603050405020304" pitchFamily="18" charset="0"/>
               </a:rPr>
-              <a:t>Реализовать энтропийный метод оценивания</a:t>
+              <a:t> </a:t>
+            </a:r>
+            <a:r>
+              <a:rPr lang="ru-RU" b="1" dirty="0">
+                <a:latin typeface="Times New Roman" panose="02020603050405020304" pitchFamily="18" charset="0"/>
+                <a:cs typeface="Times New Roman" panose="02020603050405020304" pitchFamily="18" charset="0"/>
+              </a:rPr>
+              <a:t>алгоритмическое обеспечение </a:t>
+            </a:r>
+            <a:r>
+              <a:rPr lang="ru-RU" dirty="0">
+                <a:latin typeface="Times New Roman" panose="02020603050405020304" pitchFamily="18" charset="0"/>
+                <a:cs typeface="Times New Roman" panose="02020603050405020304" pitchFamily="18" charset="0"/>
+              </a:rPr>
+              <a:t>энтропийного метода с «мягкой» рандомизацией для задачи регрессии.</a:t>
             </a:r>
           </a:p>
           <a:p>
             <a:pPr marL="342900" indent="-342900">
               <a:lnSpc>
-                <a:spcPct val="250000"/>
+                <a:spcPct val="200000"/>
               </a:lnSpc>
               <a:buFont typeface="+mj-lt"/>
               <a:buAutoNum type="arabicPeriod"/>
             </a:pPr>
             <a:r>
+              <a:rPr lang="ru-RU" b="1" dirty="0">
+                <a:latin typeface="Times New Roman" panose="02020603050405020304" pitchFamily="18" charset="0"/>
+                <a:cs typeface="Times New Roman" panose="02020603050405020304" pitchFamily="18" charset="0"/>
+              </a:rPr>
+              <a:t>Провести</a:t>
+            </a:r>
+            <a:r>
               <a:rPr lang="ru-RU" dirty="0">
                 <a:latin typeface="Times New Roman" panose="02020603050405020304" pitchFamily="18" charset="0"/>
                 <a:cs typeface="Times New Roman" panose="02020603050405020304" pitchFamily="18" charset="0"/>
               </a:rPr>
-              <a:t>Сравнить с ядерной регрессией</a:t>
+              <a:t> </a:t>
+            </a:r>
+            <a:r>
+              <a:rPr lang="ru-RU" b="1" dirty="0">
+                <a:latin typeface="Times New Roman" panose="02020603050405020304" pitchFamily="18" charset="0"/>
+                <a:cs typeface="Times New Roman" panose="02020603050405020304" pitchFamily="18" charset="0"/>
+              </a:rPr>
+              <a:t>сравнительный анализ </a:t>
+            </a:r>
+            <a:r>
+              <a:rPr lang="ru-RU" dirty="0">
+                <a:latin typeface="Times New Roman" panose="02020603050405020304" pitchFamily="18" charset="0"/>
+                <a:cs typeface="Times New Roman" panose="02020603050405020304" pitchFamily="18" charset="0"/>
+              </a:rPr>
+              <a:t>с методами ядерной регрессии на синтетических и реальных данных.</a:t>
             </a:r>
           </a:p>
           <a:p>
             <a:pPr marL="342900" indent="-342900">
               <a:lnSpc>
-                <a:spcPct val="250000"/>
+                <a:spcPct val="200000"/>
               </a:lnSpc>
               <a:buFont typeface="+mj-lt"/>
               <a:buAutoNum type="arabicPeriod"/>
             </a:pPr>
             <a:r>
+              <a:rPr lang="ru-RU" b="1" dirty="0">
+                <a:latin typeface="Times New Roman" panose="02020603050405020304" pitchFamily="18" charset="0"/>
+                <a:cs typeface="Times New Roman" panose="02020603050405020304" pitchFamily="18" charset="0"/>
+              </a:rPr>
+              <a:t>Определить</a:t>
+            </a:r>
+            <a:r>
               <a:rPr lang="ru-RU" dirty="0">
                 <a:latin typeface="Times New Roman" panose="02020603050405020304" pitchFamily="18" charset="0"/>
                 <a:cs typeface="Times New Roman" panose="02020603050405020304" pitchFamily="18" charset="0"/>
               </a:rPr>
-              <a:t>Оценить чувствительность решения к различным уровням шума</a:t>
-            </a:r>
-            <a:endParaRPr lang="ru-RU" b="1" dirty="0">
-              <a:latin typeface="Times New Roman" panose="02020603050405020304" pitchFamily="18" charset="0"/>
-              <a:cs typeface="Times New Roman" panose="02020603050405020304" pitchFamily="18" charset="0"/>
-            </a:endParaRPr>
+              <a:t> </a:t>
+            </a:r>
+            <a:r>
+              <a:rPr lang="ru-RU" b="1" dirty="0">
+                <a:latin typeface="Times New Roman" panose="02020603050405020304" pitchFamily="18" charset="0"/>
+                <a:cs typeface="Times New Roman" panose="02020603050405020304" pitchFamily="18" charset="0"/>
+              </a:rPr>
+              <a:t>границы применимости </a:t>
+            </a:r>
+            <a:r>
+              <a:rPr lang="ru-RU" dirty="0">
+                <a:latin typeface="Times New Roman" panose="02020603050405020304" pitchFamily="18" charset="0"/>
+                <a:cs typeface="Times New Roman" panose="02020603050405020304" pitchFamily="18" charset="0"/>
+              </a:rPr>
+              <a:t>метода в зависимости от объёма выборки, уровня шума и сложности модели.</a:t>
+            </a:r>
           </a:p>
         </p:txBody>
       </p:sp>
@@ -10863,357 +10840,169 @@
           </a:p>
         </p:txBody>
       </p:sp>
-      <mc:AlternateContent xmlns:mc="http://schemas.openxmlformats.org/markup-compatibility/2006" xmlns:a14="http://schemas.microsoft.com/office/drawing/2010/main">
-        <mc:Choice Requires="a14">
-          <p:sp>
-            <p:nvSpPr>
-              <p:cNvPr id="3" name="TextBox 2">
-                <a:extLst>
-                  <a:ext uri="{FF2B5EF4-FFF2-40B4-BE49-F238E27FC236}">
-                    <a16:creationId xmlns:a16="http://schemas.microsoft.com/office/drawing/2014/main" id="{3C4E704A-6A1F-5F99-7A11-9B32B46C3D6D}"/>
-                  </a:ext>
-                </a:extLst>
-              </p:cNvPr>
-              <p:cNvSpPr txBox="1"/>
-              <p:nvPr/>
-            </p:nvSpPr>
-            <p:spPr>
-              <a:xfrm>
-                <a:off x="525100" y="599122"/>
-                <a:ext cx="11416420" cy="4439933"/>
-              </a:xfrm>
-              <a:prstGeom prst="rect">
-                <a:avLst/>
-              </a:prstGeom>
-              <a:noFill/>
-            </p:spPr>
-            <p:txBody>
-              <a:bodyPr wrap="square" rtlCol="0">
-                <a:spAutoFit/>
-              </a:bodyPr>
-              <a:lstStyle/>
-              <a:p>
-                <a:pPr>
-                  <a:lnSpc>
-                    <a:spcPct val="200000"/>
-                  </a:lnSpc>
-                </a:pPr>
-                <a:r>
-                  <a:rPr lang="ru-RU" b="1" dirty="0">
-                    <a:latin typeface="Times New Roman" panose="02020603050405020304" pitchFamily="18" charset="0"/>
-                    <a:cs typeface="Times New Roman" panose="02020603050405020304" pitchFamily="18" charset="0"/>
-                  </a:rPr>
-                  <a:t>Выбор ширины окна: </a:t>
-                </a:r>
-              </a:p>
-              <a:p>
-                <a:pPr>
-                  <a:lnSpc>
-                    <a:spcPct val="200000"/>
-                  </a:lnSpc>
-                </a:pPr>
-                <a:r>
-                  <a:rPr lang="en-US" dirty="0">
-                    <a:latin typeface="Times New Roman" panose="02020603050405020304" pitchFamily="18" charset="0"/>
-                    <a:cs typeface="Times New Roman" panose="02020603050405020304" pitchFamily="18" charset="0"/>
-                  </a:rPr>
-                  <a:t>	</a:t>
-                </a:r>
-                <a:r>
-                  <a:rPr lang="ru-RU" dirty="0">
-                    <a:latin typeface="Times New Roman" panose="02020603050405020304" pitchFamily="18" charset="0"/>
-                    <a:cs typeface="Times New Roman" panose="02020603050405020304" pitchFamily="18" charset="0"/>
-                  </a:rPr>
-                  <a:t>В работе используются три подхода:</a:t>
-                </a:r>
-              </a:p>
-              <a:p>
-                <a:pPr marL="342900" indent="-342900">
-                  <a:lnSpc>
-                    <a:spcPct val="200000"/>
-                  </a:lnSpc>
-                  <a:buFont typeface="+mj-lt"/>
-                  <a:buAutoNum type="arabicPeriod"/>
-                </a:pPr>
-                <a:r>
-                  <a:rPr lang="ru-RU" b="1" dirty="0">
-                    <a:latin typeface="Times New Roman" panose="02020603050405020304" pitchFamily="18" charset="0"/>
-                    <a:cs typeface="Times New Roman" panose="02020603050405020304" pitchFamily="18" charset="0"/>
-                  </a:rPr>
-                  <a:t>Правило </a:t>
-                </a:r>
-                <a:r>
-                  <a:rPr lang="ru-RU" b="1" dirty="0" err="1">
-                    <a:latin typeface="Times New Roman" panose="02020603050405020304" pitchFamily="18" charset="0"/>
-                    <a:cs typeface="Times New Roman" panose="02020603050405020304" pitchFamily="18" charset="0"/>
-                  </a:rPr>
-                  <a:t>Сильвермана</a:t>
-                </a:r>
-                <a:r>
-                  <a:rPr lang="ru-RU" b="1" dirty="0">
-                    <a:latin typeface="Times New Roman" panose="02020603050405020304" pitchFamily="18" charset="0"/>
-                    <a:cs typeface="Times New Roman" panose="02020603050405020304" pitchFamily="18" charset="0"/>
-                  </a:rPr>
-                  <a:t> </a:t>
-                </a:r>
-                <a:r>
-                  <a:rPr lang="ru-RU" dirty="0">
-                    <a:latin typeface="Times New Roman" panose="02020603050405020304" pitchFamily="18" charset="0"/>
-                    <a:cs typeface="Times New Roman" panose="02020603050405020304" pitchFamily="18" charset="0"/>
-                  </a:rPr>
-                  <a:t>– эмпирическое правило, не зависит от </a:t>
-                </a:r>
-                <a14:m>
-                  <m:oMath xmlns:m="http://schemas.openxmlformats.org/officeDocument/2006/math">
-                    <m:r>
-                      <a:rPr lang="en-US" b="0" i="1" smtClean="0">
-                        <a:latin typeface="Cambria Math" panose="02040503050406030204" pitchFamily="18" charset="0"/>
-                        <a:cs typeface="Times New Roman" panose="02020603050405020304" pitchFamily="18" charset="0"/>
-                      </a:rPr>
-                      <m:t>𝑦</m:t>
-                    </m:r>
-                  </m:oMath>
-                </a14:m>
-                <a:r>
-                  <a:rPr lang="ru-RU" b="0" dirty="0">
-                    <a:latin typeface="Times New Roman" panose="02020603050405020304" pitchFamily="18" charset="0"/>
-                    <a:cs typeface="Times New Roman" panose="02020603050405020304" pitchFamily="18" charset="0"/>
-                  </a:rPr>
-                  <a:t>. </a:t>
-                </a:r>
-                <a:r>
-                  <a:rPr lang="ru-RU" dirty="0">
-                    <a:latin typeface="Times New Roman" panose="02020603050405020304" pitchFamily="18" charset="0"/>
-                    <a:cs typeface="Times New Roman" panose="02020603050405020304" pitchFamily="18" charset="0"/>
-                  </a:rPr>
-                  <a:t>Используется как </a:t>
-                </a:r>
-                <a:r>
-                  <a:rPr lang="en-US" dirty="0">
-                    <a:latin typeface="Times New Roman" panose="02020603050405020304" pitchFamily="18" charset="0"/>
-                    <a:cs typeface="Times New Roman" panose="02020603050405020304" pitchFamily="18" charset="0"/>
-                  </a:rPr>
-                  <a:t>baseline;</a:t>
-                </a:r>
-                <a:endParaRPr lang="en-US" b="0" dirty="0">
-                  <a:latin typeface="Times New Roman" panose="02020603050405020304" pitchFamily="18" charset="0"/>
-                  <a:cs typeface="Times New Roman" panose="02020603050405020304" pitchFamily="18" charset="0"/>
-                </a:endParaRPr>
-              </a:p>
-              <a:p>
-                <a:pPr marL="342900" indent="-342900">
-                  <a:lnSpc>
-                    <a:spcPct val="200000"/>
-                  </a:lnSpc>
-                  <a:buFont typeface="+mj-lt"/>
-                  <a:buAutoNum type="arabicPeriod"/>
-                </a:pPr>
-                <a:r>
-                  <a:rPr lang="en-US" b="1" dirty="0">
-                    <a:latin typeface="Times New Roman" panose="02020603050405020304" pitchFamily="18" charset="0"/>
-                    <a:cs typeface="Times New Roman" panose="02020603050405020304" pitchFamily="18" charset="0"/>
-                  </a:rPr>
-                  <a:t>5-fold </a:t>
-                </a:r>
-                <a:r>
-                  <a:rPr lang="ru-RU" b="1" dirty="0">
-                    <a:latin typeface="Times New Roman" panose="02020603050405020304" pitchFamily="18" charset="0"/>
-                    <a:cs typeface="Times New Roman" panose="02020603050405020304" pitchFamily="18" charset="0"/>
-                  </a:rPr>
-                  <a:t>кросс-валидация</a:t>
-                </a:r>
-                <a:r>
-                  <a:rPr lang="en-US" b="1" dirty="0">
-                    <a:latin typeface="Times New Roman" panose="02020603050405020304" pitchFamily="18" charset="0"/>
-                    <a:cs typeface="Times New Roman" panose="02020603050405020304" pitchFamily="18" charset="0"/>
-                  </a:rPr>
-                  <a:t> </a:t>
-                </a:r>
-                <a:r>
-                  <a:rPr lang="ru-RU" dirty="0">
-                    <a:latin typeface="Times New Roman" panose="02020603050405020304" pitchFamily="18" charset="0"/>
-                    <a:cs typeface="Times New Roman" panose="02020603050405020304" pitchFamily="18" charset="0"/>
-                  </a:rPr>
-                  <a:t>– делит выборку на </a:t>
-                </a:r>
-                <a:r>
-                  <a:rPr lang="en-US" dirty="0">
-                    <a:latin typeface="Times New Roman" panose="02020603050405020304" pitchFamily="18" charset="0"/>
-                    <a:cs typeface="Times New Roman" panose="02020603050405020304" pitchFamily="18" charset="0"/>
-                  </a:rPr>
-                  <a:t>5 </a:t>
-                </a:r>
-                <a:r>
-                  <a:rPr lang="ru-RU" dirty="0">
-                    <a:latin typeface="Times New Roman" panose="02020603050405020304" pitchFamily="18" charset="0"/>
-                    <a:cs typeface="Times New Roman" panose="02020603050405020304" pitchFamily="18" charset="0"/>
-                  </a:rPr>
-                  <a:t>частей, минимизирует усреднённую по </a:t>
-                </a:r>
-                <a:r>
-                  <a:rPr lang="ru-RU" dirty="0" err="1">
-                    <a:latin typeface="Times New Roman" panose="02020603050405020304" pitchFamily="18" charset="0"/>
-                    <a:cs typeface="Times New Roman" panose="02020603050405020304" pitchFamily="18" charset="0"/>
-                  </a:rPr>
-                  <a:t>фолдам</a:t>
-                </a:r>
-                <a:r>
-                  <a:rPr lang="ru-RU" dirty="0">
-                    <a:latin typeface="Times New Roman" panose="02020603050405020304" pitchFamily="18" charset="0"/>
-                    <a:cs typeface="Times New Roman" panose="02020603050405020304" pitchFamily="18" charset="0"/>
-                  </a:rPr>
-                  <a:t> </a:t>
-                </a:r>
-                <a:r>
-                  <a:rPr lang="en-US" dirty="0">
-                    <a:latin typeface="Times New Roman" panose="02020603050405020304" pitchFamily="18" charset="0"/>
-                    <a:cs typeface="Times New Roman" panose="02020603050405020304" pitchFamily="18" charset="0"/>
-                  </a:rPr>
-                  <a:t>MSE;</a:t>
-                </a:r>
-              </a:p>
-              <a:p>
-                <a:pPr marL="342900" indent="-342900">
-                  <a:lnSpc>
-                    <a:spcPct val="200000"/>
-                  </a:lnSpc>
-                  <a:buFont typeface="+mj-lt"/>
-                  <a:buAutoNum type="arabicPeriod"/>
-                </a:pPr>
-                <a:r>
-                  <a:rPr lang="ru-RU" b="1" dirty="0">
-                    <a:latin typeface="Times New Roman" panose="02020603050405020304" pitchFamily="18" charset="0"/>
-                    <a:cs typeface="Times New Roman" panose="02020603050405020304" pitchFamily="18" charset="0"/>
-                  </a:rPr>
-                  <a:t>LOOCV (</a:t>
-                </a:r>
-                <a:r>
-                  <a:rPr lang="ru-RU" b="1" dirty="0" err="1">
-                    <a:latin typeface="Times New Roman" panose="02020603050405020304" pitchFamily="18" charset="0"/>
-                    <a:cs typeface="Times New Roman" panose="02020603050405020304" pitchFamily="18" charset="0"/>
-                  </a:rPr>
-                  <a:t>leave-one-out</a:t>
-                </a:r>
-                <a:r>
-                  <a:rPr lang="ru-RU" b="1" dirty="0">
-                    <a:latin typeface="Times New Roman" panose="02020603050405020304" pitchFamily="18" charset="0"/>
-                    <a:cs typeface="Times New Roman" panose="02020603050405020304" pitchFamily="18" charset="0"/>
-                  </a:rPr>
-                  <a:t>)</a:t>
-                </a:r>
-                <a:r>
-                  <a:rPr lang="en-US" b="1" dirty="0">
-                    <a:latin typeface="Times New Roman" panose="02020603050405020304" pitchFamily="18" charset="0"/>
-                    <a:cs typeface="Times New Roman" panose="02020603050405020304" pitchFamily="18" charset="0"/>
-                  </a:rPr>
-                  <a:t> </a:t>
-                </a:r>
-                <a:r>
-                  <a:rPr lang="ru-RU" dirty="0">
-                    <a:latin typeface="Times New Roman" panose="02020603050405020304" pitchFamily="18" charset="0"/>
-                    <a:cs typeface="Times New Roman" panose="02020603050405020304" pitchFamily="18" charset="0"/>
-                  </a:rPr>
-                  <a:t>– </a:t>
-                </a:r>
-                <a:r>
-                  <a:rPr lang="ru-RU" b="1" dirty="0">
-                    <a:latin typeface="Times New Roman" panose="02020603050405020304" pitchFamily="18" charset="0"/>
-                    <a:cs typeface="Times New Roman" panose="02020603050405020304" pitchFamily="18" charset="0"/>
-                  </a:rPr>
-                  <a:t> </a:t>
-                </a:r>
-                <a:r>
-                  <a:rPr lang="ru-RU" dirty="0">
-                    <a:latin typeface="Times New Roman" panose="02020603050405020304" pitchFamily="18" charset="0"/>
-                    <a:cs typeface="Times New Roman" panose="02020603050405020304" pitchFamily="18" charset="0"/>
-                  </a:rPr>
-                  <a:t>последовательно оставляет по одной точке для тестирования, обучается на остальных и усредняет ошибку по всем итерациям.</a:t>
-                </a:r>
-              </a:p>
-              <a:p>
-                <a:pPr>
-                  <a:lnSpc>
-                    <a:spcPct val="200000"/>
-                  </a:lnSpc>
-                </a:pPr>
-                <a:endParaRPr lang="ru-RU" dirty="0">
-                  <a:latin typeface="Times New Roman" panose="02020603050405020304" pitchFamily="18" charset="0"/>
-                  <a:cs typeface="Times New Roman" panose="02020603050405020304" pitchFamily="18" charset="0"/>
-                </a:endParaRPr>
-              </a:p>
-              <a:p>
-                <a:pPr>
-                  <a:lnSpc>
-                    <a:spcPct val="200000"/>
-                  </a:lnSpc>
-                </a:pPr>
-                <a:r>
-                  <a:rPr lang="ru-RU" b="1" dirty="0">
-                    <a:latin typeface="Times New Roman" panose="02020603050405020304" pitchFamily="18" charset="0"/>
-                    <a:cs typeface="Times New Roman" panose="02020603050405020304" pitchFamily="18" charset="0"/>
-                  </a:rPr>
-                  <a:t>Ключевое ограничение: </a:t>
-                </a:r>
-                <a:r>
-                  <a:rPr lang="ru-RU" dirty="0">
-                    <a:latin typeface="Times New Roman" panose="02020603050405020304" pitchFamily="18" charset="0"/>
-                    <a:cs typeface="Times New Roman" panose="02020603050405020304" pitchFamily="18" charset="0"/>
-                  </a:rPr>
-                  <a:t>нестабильность на малых выборках.</a:t>
-                </a:r>
-                <a:endParaRPr lang="en-US" b="1" dirty="0">
-                  <a:latin typeface="Times New Roman" panose="02020603050405020304" pitchFamily="18" charset="0"/>
-                  <a:cs typeface="Times New Roman" panose="02020603050405020304" pitchFamily="18" charset="0"/>
-                </a:endParaRPr>
-              </a:p>
-            </p:txBody>
-          </p:sp>
-        </mc:Choice>
-        <mc:Fallback xmlns="">
-          <p:sp>
-            <p:nvSpPr>
-              <p:cNvPr id="3" name="TextBox 2">
-                <a:extLst>
-                  <a:ext uri="{FF2B5EF4-FFF2-40B4-BE49-F238E27FC236}">
-                    <a16:creationId xmlns:a16="http://schemas.microsoft.com/office/drawing/2014/main" id="{3C4E704A-6A1F-5F99-7A11-9B32B46C3D6D}"/>
-                  </a:ext>
-                </a:extLst>
-              </p:cNvPr>
-              <p:cNvSpPr txBox="1">
-                <a:spLocks noRot="1" noChangeAspect="1" noMove="1" noResize="1" noEditPoints="1" noAdjustHandles="1" noChangeArrowheads="1" noChangeShapeType="1" noTextEdit="1"/>
-              </p:cNvSpPr>
-              <p:nvPr/>
-            </p:nvSpPr>
-            <p:spPr>
-              <a:xfrm>
-                <a:off x="525100" y="599122"/>
-                <a:ext cx="11416420" cy="4439933"/>
-              </a:xfrm>
-              <a:prstGeom prst="rect">
-                <a:avLst/>
-              </a:prstGeom>
-              <a:blipFill>
-                <a:blip r:embed="rId2"/>
-                <a:stretch>
-                  <a:fillRect l="-427" b="-1235"/>
-                </a:stretch>
-              </a:blipFill>
-            </p:spPr>
-            <p:txBody>
-              <a:bodyPr/>
-              <a:lstStyle/>
-              <a:p>
-                <a:r>
-                  <a:rPr lang="ru-RU">
-                    <a:noFill/>
-                  </a:rPr>
-                  <a:t> </a:t>
-                </a:r>
-              </a:p>
-            </p:txBody>
-          </p:sp>
-        </mc:Fallback>
-      </mc:AlternateContent>
+      <p:sp>
+        <p:nvSpPr>
+          <p:cNvPr id="3" name="TextBox 2">
+            <a:extLst>
+              <a:ext uri="{FF2B5EF4-FFF2-40B4-BE49-F238E27FC236}">
+                <a16:creationId xmlns:a16="http://schemas.microsoft.com/office/drawing/2014/main" id="{3C4E704A-6A1F-5F99-7A11-9B32B46C3D6D}"/>
+              </a:ext>
+            </a:extLst>
+          </p:cNvPr>
+          <p:cNvSpPr txBox="1"/>
+          <p:nvPr/>
+        </p:nvSpPr>
+        <p:spPr>
+          <a:xfrm>
+            <a:off x="525100" y="599122"/>
+            <a:ext cx="11416420" cy="3331938"/>
+          </a:xfrm>
+          <a:prstGeom prst="rect">
+            <a:avLst/>
+          </a:prstGeom>
+          <a:noFill/>
+        </p:spPr>
+        <p:txBody>
+          <a:bodyPr wrap="square" rtlCol="0">
+            <a:spAutoFit/>
+          </a:bodyPr>
+          <a:lstStyle/>
+          <a:p>
+            <a:pPr>
+              <a:lnSpc>
+                <a:spcPct val="200000"/>
+              </a:lnSpc>
+            </a:pPr>
+            <a:r>
+              <a:rPr lang="ru-RU" b="1" dirty="0">
+                <a:latin typeface="Times New Roman" panose="02020603050405020304" pitchFamily="18" charset="0"/>
+                <a:cs typeface="Times New Roman" panose="02020603050405020304" pitchFamily="18" charset="0"/>
+              </a:rPr>
+              <a:t>Выбор ширины окна: </a:t>
+            </a:r>
+          </a:p>
+          <a:p>
+            <a:pPr marL="342900" indent="-342900">
+              <a:lnSpc>
+                <a:spcPct val="200000"/>
+              </a:lnSpc>
+              <a:buFont typeface="Arial" panose="020B0604020202020204" pitchFamily="34" charset="0"/>
+              <a:buChar char="•"/>
+            </a:pPr>
+            <a:r>
+              <a:rPr lang="ru-RU" dirty="0">
+                <a:latin typeface="Times New Roman" panose="02020603050405020304" pitchFamily="18" charset="0"/>
+                <a:cs typeface="Times New Roman" panose="02020603050405020304" pitchFamily="18" charset="0"/>
+              </a:rPr>
+              <a:t>Правило </a:t>
+            </a:r>
+            <a:r>
+              <a:rPr lang="ru-RU" dirty="0" err="1">
+                <a:latin typeface="Times New Roman" panose="02020603050405020304" pitchFamily="18" charset="0"/>
+                <a:cs typeface="Times New Roman" panose="02020603050405020304" pitchFamily="18" charset="0"/>
+              </a:rPr>
+              <a:t>Сильвермана</a:t>
+            </a:r>
+            <a:endParaRPr lang="en-US" dirty="0">
+              <a:latin typeface="Times New Roman" panose="02020603050405020304" pitchFamily="18" charset="0"/>
+              <a:cs typeface="Times New Roman" panose="02020603050405020304" pitchFamily="18" charset="0"/>
+            </a:endParaRPr>
+          </a:p>
+          <a:p>
+            <a:pPr marL="342900" indent="-342900">
+              <a:lnSpc>
+                <a:spcPct val="200000"/>
+              </a:lnSpc>
+              <a:buFont typeface="Arial" panose="020B0604020202020204" pitchFamily="34" charset="0"/>
+              <a:buChar char="•"/>
+            </a:pPr>
+            <a:r>
+              <a:rPr lang="en-US" dirty="0">
+                <a:latin typeface="Times New Roman" panose="02020603050405020304" pitchFamily="18" charset="0"/>
+                <a:cs typeface="Times New Roman" panose="02020603050405020304" pitchFamily="18" charset="0"/>
+              </a:rPr>
+              <a:t>5-fold </a:t>
+            </a:r>
+            <a:r>
+              <a:rPr lang="ru-RU" dirty="0">
+                <a:latin typeface="Times New Roman" panose="02020603050405020304" pitchFamily="18" charset="0"/>
+                <a:cs typeface="Times New Roman" panose="02020603050405020304" pitchFamily="18" charset="0"/>
+              </a:rPr>
+              <a:t>кросс-валидация</a:t>
+            </a:r>
+            <a:endParaRPr lang="en-US" dirty="0">
+              <a:latin typeface="Times New Roman" panose="02020603050405020304" pitchFamily="18" charset="0"/>
+              <a:cs typeface="Times New Roman" panose="02020603050405020304" pitchFamily="18" charset="0"/>
+            </a:endParaRPr>
+          </a:p>
+          <a:p>
+            <a:pPr marL="342900" indent="-342900">
+              <a:lnSpc>
+                <a:spcPct val="200000"/>
+              </a:lnSpc>
+              <a:buFont typeface="Arial" panose="020B0604020202020204" pitchFamily="34" charset="0"/>
+              <a:buChar char="•"/>
+            </a:pPr>
+            <a:r>
+              <a:rPr lang="ru-RU" dirty="0">
+                <a:latin typeface="Times New Roman" panose="02020603050405020304" pitchFamily="18" charset="0"/>
+                <a:cs typeface="Times New Roman" panose="02020603050405020304" pitchFamily="18" charset="0"/>
+              </a:rPr>
+              <a:t>LOOCV (</a:t>
+            </a:r>
+            <a:r>
+              <a:rPr lang="ru-RU" dirty="0" err="1">
+                <a:latin typeface="Times New Roman" panose="02020603050405020304" pitchFamily="18" charset="0"/>
+                <a:cs typeface="Times New Roman" panose="02020603050405020304" pitchFamily="18" charset="0"/>
+              </a:rPr>
+              <a:t>leave-one-out</a:t>
+            </a:r>
+            <a:r>
+              <a:rPr lang="ru-RU" dirty="0">
+                <a:latin typeface="Times New Roman" panose="02020603050405020304" pitchFamily="18" charset="0"/>
+                <a:cs typeface="Times New Roman" panose="02020603050405020304" pitchFamily="18" charset="0"/>
+              </a:rPr>
+              <a:t> кросс-валидация)</a:t>
+            </a:r>
+          </a:p>
+          <a:p>
+            <a:pPr>
+              <a:lnSpc>
+                <a:spcPct val="200000"/>
+              </a:lnSpc>
+            </a:pPr>
+            <a:endParaRPr lang="ru-RU" dirty="0">
+              <a:latin typeface="Times New Roman" panose="02020603050405020304" pitchFamily="18" charset="0"/>
+              <a:cs typeface="Times New Roman" panose="02020603050405020304" pitchFamily="18" charset="0"/>
+            </a:endParaRPr>
+          </a:p>
+          <a:p>
+            <a:pPr>
+              <a:lnSpc>
+                <a:spcPct val="200000"/>
+              </a:lnSpc>
+            </a:pPr>
+            <a:r>
+              <a:rPr lang="ru-RU" b="1" dirty="0">
+                <a:latin typeface="Times New Roman" panose="02020603050405020304" pitchFamily="18" charset="0"/>
+                <a:cs typeface="Times New Roman" panose="02020603050405020304" pitchFamily="18" charset="0"/>
+              </a:rPr>
+              <a:t>Ключевое ограничение: </a:t>
+            </a:r>
+            <a:r>
+              <a:rPr lang="ru-RU" dirty="0">
+                <a:latin typeface="Times New Roman" panose="02020603050405020304" pitchFamily="18" charset="0"/>
+                <a:cs typeface="Times New Roman" panose="02020603050405020304" pitchFamily="18" charset="0"/>
+              </a:rPr>
+              <a:t>нестабильность на малых выборках.</a:t>
+            </a:r>
+            <a:endParaRPr lang="en-US" b="1" dirty="0">
+              <a:latin typeface="Times New Roman" panose="02020603050405020304" pitchFamily="18" charset="0"/>
+              <a:cs typeface="Times New Roman" panose="02020603050405020304" pitchFamily="18" charset="0"/>
+            </a:endParaRPr>
+          </a:p>
+        </p:txBody>
+      </p:sp>
     </p:spTree>
     <p:extLst>
       <p:ext uri="{BB962C8B-B14F-4D97-AF65-F5344CB8AC3E}">
